--- a/paper/figs/fig1_pipeline_v12.pptx
+++ b/paper/figs/fig1_pipeline_v12.pptx
@@ -3192,239 +3192,239 @@
           <a:p>
             <a:pPr algn="l"/>
             <a:r>
+              <a:rPr sz="1900" b="1" i="1">
+                <a:solidFill>
+                  <a:srgbClr val="1F1F1E"/>
+                </a:solidFill>
+                <a:latin typeface="Times New Roman"/>
+              </a:rPr>
+              <a:t>Reading the task as skill demand</a:t>
+            </a:r>
+          </a:p>
+        </p:txBody>
+      </p:sp>
+      <p:sp>
+        <p:nvSpPr>
+          <p:cNvPr id="6" name="Rounded Rectangle 5"/>
+          <p:cNvSpPr/>
+          <p:nvPr/>
+        </p:nvSpPr>
+        <p:spPr>
+          <a:xfrm>
+            <a:off x="457200" y="749808"/>
+            <a:ext cx="914400" cy="1097280"/>
+          </a:xfrm>
+          <a:prstGeom prst="roundRect">
+            <a:avLst>
+              <a:gd name="adj" fmla="val 6000"/>
+            </a:avLst>
+          </a:prstGeom>
+          <a:solidFill>
+            <a:srgbClr val="FFFFFF"/>
+          </a:solidFill>
+          <a:ln w="15240">
+            <a:solidFill>
+              <a:srgbClr val="777777"/>
+            </a:solidFill>
+          </a:ln>
+          <a:effectLst/>
+        </p:spPr>
+        <p:txBody>
+          <a:bodyPr rtlCol="0" anchor="ctr"/>
+          <a:lstStyle/>
+          <a:p>
+            <a:pPr algn="ctr"/>
+          </a:p>
+        </p:txBody>
+      </p:sp>
+      <p:sp>
+        <p:nvSpPr>
+          <p:cNvPr id="7" name="Rounded Rectangle 6"/>
+          <p:cNvSpPr/>
+          <p:nvPr/>
+        </p:nvSpPr>
+        <p:spPr>
+          <a:xfrm>
+            <a:off x="621792" y="815644"/>
+            <a:ext cx="914400" cy="1097280"/>
+          </a:xfrm>
+          <a:prstGeom prst="roundRect">
+            <a:avLst>
+              <a:gd name="adj" fmla="val 6000"/>
+            </a:avLst>
+          </a:prstGeom>
+          <a:solidFill>
+            <a:srgbClr val="FFFFFF"/>
+          </a:solidFill>
+          <a:ln w="15240">
+            <a:solidFill>
+              <a:srgbClr val="777777"/>
+            </a:solidFill>
+          </a:ln>
+          <a:effectLst/>
+        </p:spPr>
+        <p:txBody>
+          <a:bodyPr rtlCol="0" anchor="ctr"/>
+          <a:lstStyle/>
+          <a:p>
+            <a:pPr algn="ctr"/>
+          </a:p>
+        </p:txBody>
+      </p:sp>
+      <p:sp>
+        <p:nvSpPr>
+          <p:cNvPr id="8" name="Rounded Rectangle 7"/>
+          <p:cNvSpPr/>
+          <p:nvPr/>
+        </p:nvSpPr>
+        <p:spPr>
+          <a:xfrm>
+            <a:off x="786384" y="881481"/>
+            <a:ext cx="914400" cy="1097280"/>
+          </a:xfrm>
+          <a:prstGeom prst="roundRect">
+            <a:avLst>
+              <a:gd name="adj" fmla="val 6000"/>
+            </a:avLst>
+          </a:prstGeom>
+          <a:solidFill>
+            <a:srgbClr val="FFFFFF"/>
+          </a:solidFill>
+          <a:ln w="15240">
+            <a:solidFill>
+              <a:srgbClr val="777777"/>
+            </a:solidFill>
+          </a:ln>
+          <a:effectLst/>
+        </p:spPr>
+        <p:txBody>
+          <a:bodyPr rtlCol="0" anchor="ctr"/>
+          <a:lstStyle/>
+          <a:p>
+            <a:pPr algn="ctr"/>
+          </a:p>
+        </p:txBody>
+      </p:sp>
+      <p:sp>
+        <p:nvSpPr>
+          <p:cNvPr id="9" name="Rectangle 8"/>
+          <p:cNvSpPr/>
+          <p:nvPr/>
+        </p:nvSpPr>
+        <p:spPr>
+          <a:xfrm>
+            <a:off x="932688" y="1170432"/>
+            <a:ext cx="566928" cy="50292"/>
+          </a:xfrm>
+          <a:prstGeom prst="rect">
+            <a:avLst/>
+          </a:prstGeom>
+          <a:solidFill>
+            <a:srgbClr val="C9C9C9"/>
+          </a:solidFill>
+          <a:ln>
+            <a:noFill/>
+          </a:ln>
+          <a:effectLst/>
+        </p:spPr>
+        <p:txBody>
+          <a:bodyPr rtlCol="0" anchor="ctr"/>
+          <a:lstStyle/>
+          <a:p>
+            <a:pPr algn="ctr"/>
+          </a:p>
+        </p:txBody>
+      </p:sp>
+      <p:sp>
+        <p:nvSpPr>
+          <p:cNvPr id="10" name="Rectangle 9"/>
+          <p:cNvSpPr/>
+          <p:nvPr/>
+        </p:nvSpPr>
+        <p:spPr>
+          <a:xfrm>
+            <a:off x="932688" y="1371600"/>
+            <a:ext cx="566928" cy="50292"/>
+          </a:xfrm>
+          <a:prstGeom prst="rect">
+            <a:avLst/>
+          </a:prstGeom>
+          <a:solidFill>
+            <a:srgbClr val="C9C9C9"/>
+          </a:solidFill>
+          <a:ln>
+            <a:noFill/>
+          </a:ln>
+          <a:effectLst/>
+        </p:spPr>
+        <p:txBody>
+          <a:bodyPr rtlCol="0" anchor="ctr"/>
+          <a:lstStyle/>
+          <a:p>
+            <a:pPr algn="ctr"/>
+          </a:p>
+        </p:txBody>
+      </p:sp>
+      <p:sp>
+        <p:nvSpPr>
+          <p:cNvPr id="11" name="Rectangle 10"/>
+          <p:cNvSpPr/>
+          <p:nvPr/>
+        </p:nvSpPr>
+        <p:spPr>
+          <a:xfrm>
+            <a:off x="932688" y="1572768"/>
+            <a:ext cx="566928" cy="50292"/>
+          </a:xfrm>
+          <a:prstGeom prst="rect">
+            <a:avLst/>
+          </a:prstGeom>
+          <a:solidFill>
+            <a:srgbClr val="C9C9C9"/>
+          </a:solidFill>
+          <a:ln>
+            <a:noFill/>
+          </a:ln>
+          <a:effectLst/>
+        </p:spPr>
+        <p:txBody>
+          <a:bodyPr rtlCol="0" anchor="ctr"/>
+          <a:lstStyle/>
+          <a:p>
+            <a:pPr algn="ctr"/>
+          </a:p>
+        </p:txBody>
+      </p:sp>
+      <p:sp>
+        <p:nvSpPr>
+          <p:cNvPr id="12" name="TextBox 11"/>
+          <p:cNvSpPr txBox="1"/>
+          <p:nvPr/>
+        </p:nvSpPr>
+        <p:spPr>
+          <a:xfrm>
+            <a:off x="320040" y="2011680"/>
+            <a:ext cx="1737360" cy="274320"/>
+          </a:xfrm>
+          <a:prstGeom prst="rect">
+            <a:avLst/>
+          </a:prstGeom>
+          <a:noFill/>
+        </p:spPr>
+        <p:txBody>
+          <a:bodyPr wrap="square" lIns="0" rIns="0" tIns="0" bIns="0">
+            <a:spAutoFit/>
+          </a:bodyPr>
+          <a:lstStyle/>
+          <a:p>
+            <a:pPr algn="ctr"/>
+            <a:r>
               <a:rPr sz="1400" b="1" i="1">
                 <a:solidFill>
                   <a:srgbClr val="1F1F1E"/>
                 </a:solidFill>
                 <a:latin typeface="Times New Roman"/>
               </a:rPr>
-              <a:t>Reading the task as skill demand</a:t>
-            </a:r>
-          </a:p>
-        </p:txBody>
-      </p:sp>
-      <p:sp>
-        <p:nvSpPr>
-          <p:cNvPr id="6" name="Rounded Rectangle 5"/>
-          <p:cNvSpPr/>
-          <p:nvPr/>
-        </p:nvSpPr>
-        <p:spPr>
-          <a:xfrm>
-            <a:off x="502920" y="822960"/>
-            <a:ext cx="786384" cy="932688"/>
-          </a:xfrm>
-          <a:prstGeom prst="roundRect">
-            <a:avLst>
-              <a:gd name="adj" fmla="val 6000"/>
-            </a:avLst>
-          </a:prstGeom>
-          <a:solidFill>
-            <a:srgbClr val="FFFFFF"/>
-          </a:solidFill>
-          <a:ln w="15240">
-            <a:solidFill>
-              <a:srgbClr val="777777"/>
-            </a:solidFill>
-          </a:ln>
-          <a:effectLst/>
-        </p:spPr>
-        <p:txBody>
-          <a:bodyPr rtlCol="0" anchor="ctr"/>
-          <a:lstStyle/>
-          <a:p>
-            <a:pPr algn="ctr"/>
-          </a:p>
-        </p:txBody>
-      </p:sp>
-      <p:sp>
-        <p:nvSpPr>
-          <p:cNvPr id="7" name="Rounded Rectangle 6"/>
-          <p:cNvSpPr/>
-          <p:nvPr/>
-        </p:nvSpPr>
-        <p:spPr>
-          <a:xfrm>
-            <a:off x="649224" y="881481"/>
-            <a:ext cx="786384" cy="932688"/>
-          </a:xfrm>
-          <a:prstGeom prst="roundRect">
-            <a:avLst>
-              <a:gd name="adj" fmla="val 6000"/>
-            </a:avLst>
-          </a:prstGeom>
-          <a:solidFill>
-            <a:srgbClr val="FFFFFF"/>
-          </a:solidFill>
-          <a:ln w="15240">
-            <a:solidFill>
-              <a:srgbClr val="777777"/>
-            </a:solidFill>
-          </a:ln>
-          <a:effectLst/>
-        </p:spPr>
-        <p:txBody>
-          <a:bodyPr rtlCol="0" anchor="ctr"/>
-          <a:lstStyle/>
-          <a:p>
-            <a:pPr algn="ctr"/>
-          </a:p>
-        </p:txBody>
-      </p:sp>
-      <p:sp>
-        <p:nvSpPr>
-          <p:cNvPr id="8" name="Rounded Rectangle 7"/>
-          <p:cNvSpPr/>
-          <p:nvPr/>
-        </p:nvSpPr>
-        <p:spPr>
-          <a:xfrm>
-            <a:off x="795528" y="940003"/>
-            <a:ext cx="786384" cy="932688"/>
-          </a:xfrm>
-          <a:prstGeom prst="roundRect">
-            <a:avLst>
-              <a:gd name="adj" fmla="val 6000"/>
-            </a:avLst>
-          </a:prstGeom>
-          <a:solidFill>
-            <a:srgbClr val="FFFFFF"/>
-          </a:solidFill>
-          <a:ln w="15240">
-            <a:solidFill>
-              <a:srgbClr val="777777"/>
-            </a:solidFill>
-          </a:ln>
-          <a:effectLst/>
-        </p:spPr>
-        <p:txBody>
-          <a:bodyPr rtlCol="0" anchor="ctr"/>
-          <a:lstStyle/>
-          <a:p>
-            <a:pPr algn="ctr"/>
-          </a:p>
-        </p:txBody>
-      </p:sp>
-      <p:sp>
-        <p:nvSpPr>
-          <p:cNvPr id="9" name="Rectangle 8"/>
-          <p:cNvSpPr/>
-          <p:nvPr/>
-        </p:nvSpPr>
-        <p:spPr>
-          <a:xfrm>
-            <a:off x="932688" y="1188720"/>
-            <a:ext cx="475488" cy="41148"/>
-          </a:xfrm>
-          <a:prstGeom prst="rect">
-            <a:avLst/>
-          </a:prstGeom>
-          <a:solidFill>
-            <a:srgbClr val="C9C9C9"/>
-          </a:solidFill>
-          <a:ln>
-            <a:noFill/>
-          </a:ln>
-          <a:effectLst/>
-        </p:spPr>
-        <p:txBody>
-          <a:bodyPr rtlCol="0" anchor="ctr"/>
-          <a:lstStyle/>
-          <a:p>
-            <a:pPr algn="ctr"/>
-          </a:p>
-        </p:txBody>
-      </p:sp>
-      <p:sp>
-        <p:nvSpPr>
-          <p:cNvPr id="10" name="Rectangle 9"/>
-          <p:cNvSpPr/>
-          <p:nvPr/>
-        </p:nvSpPr>
-        <p:spPr>
-          <a:xfrm>
-            <a:off x="932688" y="1353312"/>
-            <a:ext cx="475488" cy="41148"/>
-          </a:xfrm>
-          <a:prstGeom prst="rect">
-            <a:avLst/>
-          </a:prstGeom>
-          <a:solidFill>
-            <a:srgbClr val="C9C9C9"/>
-          </a:solidFill>
-          <a:ln>
-            <a:noFill/>
-          </a:ln>
-          <a:effectLst/>
-        </p:spPr>
-        <p:txBody>
-          <a:bodyPr rtlCol="0" anchor="ctr"/>
-          <a:lstStyle/>
-          <a:p>
-            <a:pPr algn="ctr"/>
-          </a:p>
-        </p:txBody>
-      </p:sp>
-      <p:sp>
-        <p:nvSpPr>
-          <p:cNvPr id="11" name="Rectangle 10"/>
-          <p:cNvSpPr/>
-          <p:nvPr/>
-        </p:nvSpPr>
-        <p:spPr>
-          <a:xfrm>
-            <a:off x="932688" y="1517904"/>
-            <a:ext cx="475488" cy="41148"/>
-          </a:xfrm>
-          <a:prstGeom prst="rect">
-            <a:avLst/>
-          </a:prstGeom>
-          <a:solidFill>
-            <a:srgbClr val="C9C9C9"/>
-          </a:solidFill>
-          <a:ln>
-            <a:noFill/>
-          </a:ln>
-          <a:effectLst/>
-        </p:spPr>
-        <p:txBody>
-          <a:bodyPr rtlCol="0" anchor="ctr"/>
-          <a:lstStyle/>
-          <a:p>
-            <a:pPr algn="ctr"/>
-          </a:p>
-        </p:txBody>
-      </p:sp>
-      <p:sp>
-        <p:nvSpPr>
-          <p:cNvPr id="12" name="TextBox 11"/>
-          <p:cNvSpPr txBox="1"/>
-          <p:nvPr/>
-        </p:nvSpPr>
-        <p:spPr>
-          <a:xfrm>
-            <a:off x="384048" y="1975104"/>
-            <a:ext cx="1554480" cy="274320"/>
-          </a:xfrm>
-          <a:prstGeom prst="rect">
-            <a:avLst/>
-          </a:prstGeom>
-          <a:noFill/>
-        </p:spPr>
-        <p:txBody>
-          <a:bodyPr wrap="square" lIns="0" rIns="0" tIns="0" bIns="0">
-            <a:spAutoFit/>
-          </a:bodyPr>
-          <a:lstStyle/>
-          <a:p>
-            <a:pPr algn="ctr"/>
-            <a:r>
-              <a:rPr sz="1100" b="1" i="1">
-                <a:solidFill>
-                  <a:srgbClr val="1F1F1E"/>
-                </a:solidFill>
-                <a:latin typeface="Times New Roman"/>
-              </a:rPr>
               <a:t>Support Set S</a:t>
             </a:r>
           </a:p>
@@ -3461,8 +3461,8 @@
         </p:nvSpPr>
         <p:spPr>
           <a:xfrm>
-            <a:off x="2400300" y="891540"/>
-            <a:ext cx="960120" cy="868680"/>
+            <a:off x="2286000" y="772668"/>
+            <a:ext cx="1188720" cy="1051560"/>
           </a:xfrm>
           <a:prstGeom prst="roundRect">
             <a:avLst>
@@ -3495,7 +3495,7 @@
         </p:nvSpPr>
         <p:spPr>
           <a:xfrm>
-            <a:off x="2869387" y="763524"/>
+            <a:off x="2869387" y="644652"/>
             <a:ext cx="21945" cy="128016"/>
           </a:xfrm>
           <a:prstGeom prst="rect">
@@ -3525,7 +3525,7 @@
         </p:nvSpPr>
         <p:spPr>
           <a:xfrm>
-            <a:off x="2834640" y="672084"/>
+            <a:off x="2834640" y="553212"/>
             <a:ext cx="91440" cy="91440"/>
           </a:xfrm>
           <a:prstGeom prst="ellipse">
@@ -3555,7 +3555,7 @@
         </p:nvSpPr>
         <p:spPr>
           <a:xfrm>
-            <a:off x="2666390" y="1197864"/>
+            <a:off x="2625242" y="1152144"/>
             <a:ext cx="82296" cy="82296"/>
           </a:xfrm>
           <a:prstGeom prst="ellipse">
@@ -3585,7 +3585,7 @@
         </p:nvSpPr>
         <p:spPr>
           <a:xfrm>
-            <a:off x="3012033" y="1197864"/>
+            <a:off x="3053181" y="1152144"/>
             <a:ext cx="82296" cy="82296"/>
           </a:xfrm>
           <a:prstGeom prst="ellipse">
@@ -3615,8 +3615,8 @@
         </p:nvSpPr>
         <p:spPr>
           <a:xfrm>
-            <a:off x="2745943" y="1430121"/>
-            <a:ext cx="268833" cy="27432"/>
+            <a:off x="2713939" y="1424635"/>
+            <a:ext cx="332841" cy="27432"/>
           </a:xfrm>
           <a:prstGeom prst="roundRect">
             <a:avLst>
@@ -3647,8 +3647,8 @@
         </p:nvSpPr>
         <p:spPr>
           <a:xfrm>
-            <a:off x="2080260" y="1796795"/>
-            <a:ext cx="1600200" cy="256032"/>
+            <a:off x="1965960" y="1860803"/>
+            <a:ext cx="1828800" cy="256032"/>
           </a:xfrm>
           <a:prstGeom prst="rect">
             <a:avLst/>
@@ -3663,7 +3663,7 @@
           <a:p>
             <a:pPr algn="ctr"/>
             <a:r>
-              <a:rPr sz="950" b="1" i="0">
+              <a:rPr sz="1300" b="1" i="0">
                 <a:solidFill>
                   <a:srgbClr val="1F1F1E"/>
                 </a:solidFill>
@@ -3741,7 +3741,7 @@
         <p:spPr>
           <a:xfrm>
             <a:off x="4178808" y="1764792"/>
-            <a:ext cx="690372" cy="0"/>
+            <a:ext cx="864108" cy="0"/>
           </a:xfrm>
           <a:prstGeom prst="line">
             <a:avLst/>
@@ -3763,7 +3763,7 @@
         <p:spPr>
           <a:xfrm>
             <a:off x="4178808" y="1618488"/>
-            <a:ext cx="690372" cy="0"/>
+            <a:ext cx="864108" cy="0"/>
           </a:xfrm>
           <a:prstGeom prst="line">
             <a:avLst/>
@@ -3785,7 +3785,7 @@
         <p:spPr>
           <a:xfrm>
             <a:off x="4178808" y="1472184"/>
-            <a:ext cx="690372" cy="0"/>
+            <a:ext cx="864108" cy="0"/>
           </a:xfrm>
           <a:prstGeom prst="line">
             <a:avLst/>
@@ -3807,7 +3807,7 @@
         <p:spPr>
           <a:xfrm>
             <a:off x="4178808" y="1325880"/>
-            <a:ext cx="690372" cy="0"/>
+            <a:ext cx="864108" cy="0"/>
           </a:xfrm>
           <a:prstGeom prst="line">
             <a:avLst/>
@@ -3829,7 +3829,7 @@
         <p:spPr>
           <a:xfrm>
             <a:off x="4178808" y="1783080"/>
-            <a:ext cx="690372" cy="0"/>
+            <a:ext cx="864108" cy="0"/>
           </a:xfrm>
           <a:prstGeom prst="line">
             <a:avLst/>
@@ -3851,7 +3851,7 @@
         <p:spPr>
           <a:xfrm>
             <a:off x="4224528" y="1216152"/>
-            <a:ext cx="118872" cy="566928"/>
+            <a:ext cx="155448" cy="566928"/>
           </a:xfrm>
           <a:prstGeom prst="rect">
             <a:avLst/>
@@ -3882,8 +3882,8 @@
         </p:nvSpPr>
         <p:spPr>
           <a:xfrm>
-            <a:off x="4384548" y="1508760"/>
-            <a:ext cx="118872" cy="274320"/>
+            <a:off x="4430268" y="1508760"/>
+            <a:ext cx="155448" cy="274320"/>
           </a:xfrm>
           <a:prstGeom prst="rect">
             <a:avLst/>
@@ -3914,8 +3914,8 @@
         </p:nvSpPr>
         <p:spPr>
           <a:xfrm>
-            <a:off x="4544568" y="1325880"/>
-            <a:ext cx="118872" cy="457200"/>
+            <a:off x="4636008" y="1325880"/>
+            <a:ext cx="155448" cy="457200"/>
           </a:xfrm>
           <a:prstGeom prst="rect">
             <a:avLst/>
@@ -3946,8 +3946,8 @@
         </p:nvSpPr>
         <p:spPr>
           <a:xfrm>
-            <a:off x="4704588" y="1581912"/>
-            <a:ext cx="118872" cy="201168"/>
+            <a:off x="4841748" y="1581912"/>
+            <a:ext cx="155448" cy="201168"/>
           </a:xfrm>
           <a:prstGeom prst="rect">
             <a:avLst/>
@@ -3978,8 +3978,8 @@
         </p:nvSpPr>
         <p:spPr>
           <a:xfrm>
-            <a:off x="3977639" y="1920240"/>
-            <a:ext cx="1463040" cy="274320"/>
+            <a:off x="3840480" y="1956816"/>
+            <a:ext cx="1920240" cy="274320"/>
           </a:xfrm>
           <a:prstGeom prst="rect">
             <a:avLst/>
@@ -3994,7 +3994,7 @@
           <a:p>
             <a:pPr algn="ctr"/>
             <a:r>
-              <a:rPr sz="1100" b="1" i="1">
+              <a:rPr sz="1400" b="1" i="1">
                 <a:solidFill>
                   <a:srgbClr val="1F1F1E"/>
                 </a:solidFill>
@@ -4029,2105 +4029,2105 @@
           <a:p>
             <a:pPr algn="ctr"/>
             <a:r>
+              <a:rPr sz="1900" b="0" i="0">
+                <a:solidFill>
+                  <a:srgbClr val="1F1F1E"/>
+                </a:solidFill>
+                <a:latin typeface="Times New Roman"/>
+              </a:rPr>
+              <a:t>min‖X − CD‖²  +  λ‖C‖₁</a:t>
+            </a:r>
+          </a:p>
+        </p:txBody>
+      </p:sp>
+      <p:cxnSp>
+        <p:nvCxnSpPr>
+          <p:cNvPr id="34" name="Connector 33"/>
+          <p:cNvCxnSpPr/>
+          <p:nvPr/>
+        </p:nvCxnSpPr>
+        <p:spPr>
+          <a:xfrm>
+            <a:off x="4206240" y="2331720"/>
+            <a:ext cx="0" cy="685800"/>
+          </a:xfrm>
+          <a:prstGeom prst="line">
+            <a:avLst/>
+          </a:prstGeom>
+          <a:ln w="30480">
+            <a:solidFill>
+              <a:srgbClr val="333333"/>
+            </a:solidFill>
+            <a:tailEnd type="triangle" w="med" len="med"/>
+          </a:ln>
+          <a:effectLst/>
+        </p:spPr>
+      </p:cxnSp>
+      <p:sp>
+        <p:nvSpPr>
+          <p:cNvPr id="35" name="Rounded Rectangle 34"/>
+          <p:cNvSpPr/>
+          <p:nvPr/>
+        </p:nvSpPr>
+        <p:spPr>
+          <a:xfrm>
+            <a:off x="731520" y="3127248"/>
+            <a:ext cx="457200" cy="457200"/>
+          </a:xfrm>
+          <a:prstGeom prst="roundRect">
+            <a:avLst>
+              <a:gd name="adj" fmla="val 18000"/>
+            </a:avLst>
+          </a:prstGeom>
+          <a:solidFill>
+            <a:srgbClr val="4C72B0"/>
+          </a:solidFill>
+          <a:ln w="15240">
+            <a:solidFill>
+              <a:srgbClr val="FFFFFF"/>
+            </a:solidFill>
+          </a:ln>
+          <a:effectLst/>
+        </p:spPr>
+        <p:txBody>
+          <a:bodyPr rtlCol="0" anchor="ctr"/>
+          <a:lstStyle/>
+          <a:p>
+            <a:pPr algn="ctr"/>
+          </a:p>
+        </p:txBody>
+      </p:sp>
+      <p:sp>
+        <p:nvSpPr>
+          <p:cNvPr id="36" name="Rounded Rectangle 35"/>
+          <p:cNvSpPr/>
+          <p:nvPr/>
+        </p:nvSpPr>
+        <p:spPr>
+          <a:xfrm>
+            <a:off x="1298448" y="3127248"/>
+            <a:ext cx="457200" cy="457200"/>
+          </a:xfrm>
+          <a:prstGeom prst="roundRect">
+            <a:avLst>
+              <a:gd name="adj" fmla="val 18000"/>
+            </a:avLst>
+          </a:prstGeom>
+          <a:solidFill>
+            <a:srgbClr val="5F9EA0"/>
+          </a:solidFill>
+          <a:ln w="15240">
+            <a:solidFill>
+              <a:srgbClr val="FFFFFF"/>
+            </a:solidFill>
+          </a:ln>
+          <a:effectLst/>
+        </p:spPr>
+        <p:txBody>
+          <a:bodyPr rtlCol="0" anchor="ctr"/>
+          <a:lstStyle/>
+          <a:p>
+            <a:pPr algn="ctr"/>
+          </a:p>
+        </p:txBody>
+      </p:sp>
+      <p:sp>
+        <p:nvSpPr>
+          <p:cNvPr id="37" name="Rounded Rectangle 36"/>
+          <p:cNvSpPr/>
+          <p:nvPr/>
+        </p:nvSpPr>
+        <p:spPr>
+          <a:xfrm>
+            <a:off x="1865376" y="3127248"/>
+            <a:ext cx="457200" cy="457200"/>
+          </a:xfrm>
+          <a:prstGeom prst="roundRect">
+            <a:avLst>
+              <a:gd name="adj" fmla="val 18000"/>
+            </a:avLst>
+          </a:prstGeom>
+          <a:solidFill>
+            <a:srgbClr val="7BA7D7"/>
+          </a:solidFill>
+          <a:ln w="15240">
+            <a:solidFill>
+              <a:srgbClr val="FFFFFF"/>
+            </a:solidFill>
+          </a:ln>
+          <a:effectLst/>
+        </p:spPr>
+        <p:txBody>
+          <a:bodyPr rtlCol="0" anchor="ctr"/>
+          <a:lstStyle/>
+          <a:p>
+            <a:pPr algn="ctr"/>
+          </a:p>
+        </p:txBody>
+      </p:sp>
+      <p:sp>
+        <p:nvSpPr>
+          <p:cNvPr id="38" name="Rounded Rectangle 37"/>
+          <p:cNvSpPr/>
+          <p:nvPr/>
+        </p:nvSpPr>
+        <p:spPr>
+          <a:xfrm>
+            <a:off x="2432304" y="3127248"/>
+            <a:ext cx="457200" cy="457200"/>
+          </a:xfrm>
+          <a:prstGeom prst="roundRect">
+            <a:avLst>
+              <a:gd name="adj" fmla="val 18000"/>
+            </a:avLst>
+          </a:prstGeom>
+          <a:solidFill>
+            <a:srgbClr val="F2B98F"/>
+          </a:solidFill>
+          <a:ln w="15240">
+            <a:solidFill>
+              <a:srgbClr val="FFFFFF"/>
+            </a:solidFill>
+          </a:ln>
+          <a:effectLst/>
+        </p:spPr>
+        <p:txBody>
+          <a:bodyPr rtlCol="0" anchor="ctr"/>
+          <a:lstStyle/>
+          <a:p>
+            <a:pPr algn="ctr"/>
+          </a:p>
+        </p:txBody>
+      </p:sp>
+      <p:sp>
+        <p:nvSpPr>
+          <p:cNvPr id="39" name="Rounded Rectangle 38"/>
+          <p:cNvSpPr/>
+          <p:nvPr/>
+        </p:nvSpPr>
+        <p:spPr>
+          <a:xfrm>
+            <a:off x="2999232" y="3127248"/>
+            <a:ext cx="457200" cy="457200"/>
+          </a:xfrm>
+          <a:prstGeom prst="roundRect">
+            <a:avLst>
+              <a:gd name="adj" fmla="val 18000"/>
+            </a:avLst>
+          </a:prstGeom>
+          <a:solidFill>
+            <a:srgbClr val="E29A9A"/>
+          </a:solidFill>
+          <a:ln w="15240">
+            <a:solidFill>
+              <a:srgbClr val="FFFFFF"/>
+            </a:solidFill>
+          </a:ln>
+          <a:effectLst/>
+        </p:spPr>
+        <p:txBody>
+          <a:bodyPr rtlCol="0" anchor="ctr"/>
+          <a:lstStyle/>
+          <a:p>
+            <a:pPr algn="ctr"/>
+          </a:p>
+        </p:txBody>
+      </p:sp>
+      <p:sp>
+        <p:nvSpPr>
+          <p:cNvPr id="40" name="TextBox 39"/>
+          <p:cNvSpPr txBox="1"/>
+          <p:nvPr/>
+        </p:nvSpPr>
+        <p:spPr>
+          <a:xfrm>
+            <a:off x="411480" y="3657600"/>
+            <a:ext cx="3291840" cy="274320"/>
+          </a:xfrm>
+          <a:prstGeom prst="rect">
+            <a:avLst/>
+          </a:prstGeom>
+          <a:noFill/>
+        </p:spPr>
+        <p:txBody>
+          <a:bodyPr wrap="square" lIns="0" rIns="0" tIns="0" bIns="0">
+            <a:spAutoFit/>
+          </a:bodyPr>
+          <a:lstStyle/>
+          <a:p>
+            <a:pPr algn="ctr"/>
+            <a:r>
+              <a:rPr sz="1400" b="1" i="1">
+                <a:solidFill>
+                  <a:srgbClr val="1F1F1E"/>
+                </a:solidFill>
+                <a:latin typeface="Times New Roman"/>
+              </a:rPr>
+              <a:t>Capability Atoms (dictionary D)</a:t>
+            </a:r>
+          </a:p>
+        </p:txBody>
+      </p:sp>
+      <p:cxnSp>
+        <p:nvCxnSpPr>
+          <p:cNvPr id="41" name="Connector 40"/>
+          <p:cNvCxnSpPr/>
+          <p:nvPr/>
+        </p:nvCxnSpPr>
+        <p:spPr>
+          <a:xfrm>
+            <a:off x="3639312" y="3355848"/>
+            <a:ext cx="365760" cy="0"/>
+          </a:xfrm>
+          <a:prstGeom prst="line">
+            <a:avLst/>
+          </a:prstGeom>
+          <a:ln w="30480">
+            <a:solidFill>
+              <a:srgbClr val="333333"/>
+            </a:solidFill>
+            <a:tailEnd type="triangle" w="med" len="med"/>
+          </a:ln>
+          <a:effectLst/>
+        </p:spPr>
+      </p:cxnSp>
+      <p:cxnSp>
+        <p:nvCxnSpPr>
+          <p:cNvPr id="42" name="Connector 41"/>
+          <p:cNvCxnSpPr/>
+          <p:nvPr/>
+        </p:nvCxnSpPr>
+        <p:spPr>
+          <a:xfrm>
+            <a:off x="4087368" y="3730752"/>
+            <a:ext cx="864108" cy="0"/>
+          </a:xfrm>
+          <a:prstGeom prst="line">
+            <a:avLst/>
+          </a:prstGeom>
+          <a:ln w="11430">
+            <a:solidFill>
+              <a:srgbClr val="E4E4E4"/>
+            </a:solidFill>
+          </a:ln>
+          <a:effectLst/>
+        </p:spPr>
+      </p:cxnSp>
+      <p:cxnSp>
+        <p:nvCxnSpPr>
+          <p:cNvPr id="43" name="Connector 42"/>
+          <p:cNvCxnSpPr/>
+          <p:nvPr/>
+        </p:nvCxnSpPr>
+        <p:spPr>
+          <a:xfrm>
+            <a:off x="4087368" y="3584448"/>
+            <a:ext cx="864108" cy="0"/>
+          </a:xfrm>
+          <a:prstGeom prst="line">
+            <a:avLst/>
+          </a:prstGeom>
+          <a:ln w="11430">
+            <a:solidFill>
+              <a:srgbClr val="E4E4E4"/>
+            </a:solidFill>
+          </a:ln>
+          <a:effectLst/>
+        </p:spPr>
+      </p:cxnSp>
+      <p:cxnSp>
+        <p:nvCxnSpPr>
+          <p:cNvPr id="44" name="Connector 43"/>
+          <p:cNvCxnSpPr/>
+          <p:nvPr/>
+        </p:nvCxnSpPr>
+        <p:spPr>
+          <a:xfrm>
+            <a:off x="4087368" y="3438144"/>
+            <a:ext cx="864108" cy="0"/>
+          </a:xfrm>
+          <a:prstGeom prst="line">
+            <a:avLst/>
+          </a:prstGeom>
+          <a:ln w="11430">
+            <a:solidFill>
+              <a:srgbClr val="E4E4E4"/>
+            </a:solidFill>
+          </a:ln>
+          <a:effectLst/>
+        </p:spPr>
+      </p:cxnSp>
+      <p:cxnSp>
+        <p:nvCxnSpPr>
+          <p:cNvPr id="45" name="Connector 44"/>
+          <p:cNvCxnSpPr/>
+          <p:nvPr/>
+        </p:nvCxnSpPr>
+        <p:spPr>
+          <a:xfrm>
+            <a:off x="4087368" y="3291840"/>
+            <a:ext cx="864108" cy="0"/>
+          </a:xfrm>
+          <a:prstGeom prst="line">
+            <a:avLst/>
+          </a:prstGeom>
+          <a:ln w="11430">
+            <a:solidFill>
+              <a:srgbClr val="E4E4E4"/>
+            </a:solidFill>
+          </a:ln>
+          <a:effectLst/>
+        </p:spPr>
+      </p:cxnSp>
+      <p:cxnSp>
+        <p:nvCxnSpPr>
+          <p:cNvPr id="46" name="Connector 45"/>
+          <p:cNvCxnSpPr/>
+          <p:nvPr/>
+        </p:nvCxnSpPr>
+        <p:spPr>
+          <a:xfrm>
+            <a:off x="4087368" y="3749039"/>
+            <a:ext cx="864107" cy="0"/>
+          </a:xfrm>
+          <a:prstGeom prst="line">
+            <a:avLst/>
+          </a:prstGeom>
+          <a:ln w="17780">
+            <a:solidFill>
+              <a:srgbClr val="555555"/>
+            </a:solidFill>
+          </a:ln>
+          <a:effectLst/>
+        </p:spPr>
+      </p:cxnSp>
+      <p:sp>
+        <p:nvSpPr>
+          <p:cNvPr id="47" name="Rectangle 46"/>
+          <p:cNvSpPr/>
+          <p:nvPr/>
+        </p:nvSpPr>
+        <p:spPr>
+          <a:xfrm>
+            <a:off x="4133087" y="3145535"/>
+            <a:ext cx="155448" cy="603504"/>
+          </a:xfrm>
+          <a:prstGeom prst="rect">
+            <a:avLst/>
+          </a:prstGeom>
+          <a:solidFill>
+            <a:srgbClr val="4C72B0"/>
+          </a:solidFill>
+          <a:ln w="12700">
+            <a:solidFill>
+              <a:srgbClr val="666666"/>
+            </a:solidFill>
+          </a:ln>
+          <a:effectLst/>
+        </p:spPr>
+        <p:txBody>
+          <a:bodyPr rtlCol="0" anchor="ctr"/>
+          <a:lstStyle/>
+          <a:p>
+            <a:pPr algn="ctr"/>
+          </a:p>
+        </p:txBody>
+      </p:sp>
+      <p:sp>
+        <p:nvSpPr>
+          <p:cNvPr id="48" name="Rectangle 47"/>
+          <p:cNvSpPr/>
+          <p:nvPr/>
+        </p:nvSpPr>
+        <p:spPr>
+          <a:xfrm>
+            <a:off x="4338827" y="3346703"/>
+            <a:ext cx="155448" cy="402336"/>
+          </a:xfrm>
+          <a:prstGeom prst="rect">
+            <a:avLst/>
+          </a:prstGeom>
+          <a:solidFill>
+            <a:srgbClr val="5F9EA0"/>
+          </a:solidFill>
+          <a:ln w="12700">
+            <a:solidFill>
+              <a:srgbClr val="666666"/>
+            </a:solidFill>
+          </a:ln>
+          <a:effectLst/>
+        </p:spPr>
+        <p:txBody>
+          <a:bodyPr rtlCol="0" anchor="ctr"/>
+          <a:lstStyle/>
+          <a:p>
+            <a:pPr algn="ctr"/>
+          </a:p>
+        </p:txBody>
+      </p:sp>
+      <p:sp>
+        <p:nvSpPr>
+          <p:cNvPr id="49" name="Rectangle 48"/>
+          <p:cNvSpPr/>
+          <p:nvPr/>
+        </p:nvSpPr>
+        <p:spPr>
+          <a:xfrm>
+            <a:off x="4544568" y="3493007"/>
+            <a:ext cx="155448" cy="256032"/>
+          </a:xfrm>
+          <a:prstGeom prst="rect">
+            <a:avLst/>
+          </a:prstGeom>
+          <a:solidFill>
+            <a:srgbClr val="7BA7D7"/>
+          </a:solidFill>
+          <a:ln w="12700">
+            <a:solidFill>
+              <a:srgbClr val="666666"/>
+            </a:solidFill>
+          </a:ln>
+          <a:effectLst/>
+        </p:spPr>
+        <p:txBody>
+          <a:bodyPr rtlCol="0" anchor="ctr"/>
+          <a:lstStyle/>
+          <a:p>
+            <a:pPr algn="ctr"/>
+          </a:p>
+        </p:txBody>
+      </p:sp>
+      <p:sp>
+        <p:nvSpPr>
+          <p:cNvPr id="50" name="Rectangle 49"/>
+          <p:cNvSpPr/>
+          <p:nvPr/>
+        </p:nvSpPr>
+        <p:spPr>
+          <a:xfrm>
+            <a:off x="4750307" y="3657599"/>
+            <a:ext cx="155448" cy="91440"/>
+          </a:xfrm>
+          <a:prstGeom prst="rect">
+            <a:avLst/>
+          </a:prstGeom>
+          <a:solidFill>
+            <a:srgbClr val="C9C9C9"/>
+          </a:solidFill>
+          <a:ln w="12700">
+            <a:solidFill>
+              <a:srgbClr val="666666"/>
+            </a:solidFill>
+          </a:ln>
+          <a:effectLst/>
+        </p:spPr>
+        <p:txBody>
+          <a:bodyPr rtlCol="0" anchor="ctr"/>
+          <a:lstStyle/>
+          <a:p>
+            <a:pPr algn="ctr"/>
+          </a:p>
+        </p:txBody>
+      </p:sp>
+      <p:sp>
+        <p:nvSpPr>
+          <p:cNvPr id="51" name="TextBox 50"/>
+          <p:cNvSpPr txBox="1"/>
+          <p:nvPr/>
+        </p:nvSpPr>
+        <p:spPr>
+          <a:xfrm>
+            <a:off x="3703320" y="3931920"/>
+            <a:ext cx="2011680" cy="274320"/>
+          </a:xfrm>
+          <a:prstGeom prst="rect">
+            <a:avLst/>
+          </a:prstGeom>
+          <a:noFill/>
+        </p:spPr>
+        <p:txBody>
+          <a:bodyPr wrap="square" lIns="0" rIns="0" tIns="0" bIns="0">
+            <a:spAutoFit/>
+          </a:bodyPr>
+          <a:lstStyle/>
+          <a:p>
+            <a:pPr algn="ctr"/>
+            <a:r>
+              <a:rPr sz="1400" b="1" i="1">
+                <a:solidFill>
+                  <a:srgbClr val="1F1F1E"/>
+                </a:solidFill>
+                <a:latin typeface="Times New Roman"/>
+              </a:rPr>
+              <a:t>Task Demand w</a:t>
+            </a:r>
+          </a:p>
+        </p:txBody>
+      </p:sp>
+      <p:sp>
+        <p:nvSpPr>
+          <p:cNvPr id="52" name="TextBox 51"/>
+          <p:cNvSpPr txBox="1"/>
+          <p:nvPr/>
+        </p:nvSpPr>
+        <p:spPr>
+          <a:xfrm>
+            <a:off x="457200" y="4297680"/>
+            <a:ext cx="5303520" cy="329184"/>
+          </a:xfrm>
+          <a:prstGeom prst="rect">
+            <a:avLst/>
+          </a:prstGeom>
+          <a:noFill/>
+        </p:spPr>
+        <p:txBody>
+          <a:bodyPr wrap="square" lIns="0" rIns="0" tIns="0" bIns="0">
+            <a:spAutoFit/>
+          </a:bodyPr>
+          <a:lstStyle/>
+          <a:p>
+            <a:pPr algn="ctr"/>
+            <a:r>
+              <a:rPr sz="1700" b="0" i="0">
+                <a:solidFill>
+                  <a:srgbClr val="1F1F1E"/>
+                </a:solidFill>
+                <a:latin typeface="Times New Roman"/>
+              </a:rPr>
+              <a:t>per-skill token quota  =  w · b</a:t>
+            </a:r>
+          </a:p>
+        </p:txBody>
+      </p:sp>
+      <p:sp>
+        <p:nvSpPr>
+          <p:cNvPr id="53" name="TextBox 52"/>
+          <p:cNvSpPr txBox="1"/>
+          <p:nvPr/>
+        </p:nvSpPr>
+        <p:spPr>
+          <a:xfrm>
+            <a:off x="320040" y="4754880"/>
+            <a:ext cx="5394960" cy="274320"/>
+          </a:xfrm>
+          <a:prstGeom prst="rect">
+            <a:avLst/>
+          </a:prstGeom>
+          <a:noFill/>
+        </p:spPr>
+        <p:txBody>
+          <a:bodyPr wrap="square" lIns="0" rIns="0" tIns="0" bIns="0">
+            <a:spAutoFit/>
+          </a:bodyPr>
+          <a:lstStyle/>
+          <a:p>
+            <a:pPr algn="l"/>
+            <a:r>
+              <a:rPr sz="1500" b="1" i="1">
+                <a:solidFill>
+                  <a:srgbClr val="1F1F1E"/>
+                </a:solidFill>
+                <a:latin typeface="Times New Roman"/>
+              </a:rPr>
+              <a:t>Cross-modal bridge (fit on paid pairs)</a:t>
+            </a:r>
+          </a:p>
+        </p:txBody>
+      </p:sp>
+      <p:cxnSp>
+        <p:nvCxnSpPr>
+          <p:cNvPr id="54" name="Connector 53"/>
+          <p:cNvCxnSpPr/>
+          <p:nvPr/>
+        </p:nvCxnSpPr>
+        <p:spPr>
+          <a:xfrm>
+            <a:off x="640080" y="5897880"/>
+            <a:ext cx="658368" cy="0"/>
+          </a:xfrm>
+          <a:prstGeom prst="line">
+            <a:avLst/>
+          </a:prstGeom>
+          <a:ln w="17780">
+            <a:solidFill>
+              <a:srgbClr val="555555"/>
+            </a:solidFill>
+          </a:ln>
+          <a:effectLst/>
+        </p:spPr>
+      </p:cxnSp>
+      <p:sp>
+        <p:nvSpPr>
+          <p:cNvPr id="55" name="Rectangle 54"/>
+          <p:cNvSpPr/>
+          <p:nvPr/>
+        </p:nvSpPr>
+        <p:spPr>
+          <a:xfrm>
+            <a:off x="685800" y="5623560"/>
+            <a:ext cx="155448" cy="274320"/>
+          </a:xfrm>
+          <a:prstGeom prst="rect">
+            <a:avLst/>
+          </a:prstGeom>
+          <a:solidFill>
+            <a:srgbClr val="C9C9C9"/>
+          </a:solidFill>
+          <a:ln w="12700">
+            <a:solidFill>
+              <a:srgbClr val="666666"/>
+            </a:solidFill>
+          </a:ln>
+          <a:effectLst/>
+        </p:spPr>
+        <p:txBody>
+          <a:bodyPr rtlCol="0" anchor="ctr"/>
+          <a:lstStyle/>
+          <a:p>
+            <a:pPr algn="ctr"/>
+          </a:p>
+        </p:txBody>
+      </p:sp>
+      <p:sp>
+        <p:nvSpPr>
+          <p:cNvPr id="56" name="Rectangle 55"/>
+          <p:cNvSpPr/>
+          <p:nvPr/>
+        </p:nvSpPr>
+        <p:spPr>
+          <a:xfrm>
+            <a:off x="891540" y="5458968"/>
+            <a:ext cx="155448" cy="438912"/>
+          </a:xfrm>
+          <a:prstGeom prst="rect">
+            <a:avLst/>
+          </a:prstGeom>
+          <a:solidFill>
+            <a:srgbClr val="C9C9C9"/>
+          </a:solidFill>
+          <a:ln w="12700">
+            <a:solidFill>
+              <a:srgbClr val="666666"/>
+            </a:solidFill>
+          </a:ln>
+          <a:effectLst/>
+        </p:spPr>
+        <p:txBody>
+          <a:bodyPr rtlCol="0" anchor="ctr"/>
+          <a:lstStyle/>
+          <a:p>
+            <a:pPr algn="ctr"/>
+          </a:p>
+        </p:txBody>
+      </p:sp>
+      <p:sp>
+        <p:nvSpPr>
+          <p:cNvPr id="57" name="Rectangle 56"/>
+          <p:cNvSpPr/>
+          <p:nvPr/>
+        </p:nvSpPr>
+        <p:spPr>
+          <a:xfrm>
+            <a:off x="1097280" y="5696712"/>
+            <a:ext cx="155448" cy="201168"/>
+          </a:xfrm>
+          <a:prstGeom prst="rect">
+            <a:avLst/>
+          </a:prstGeom>
+          <a:solidFill>
+            <a:srgbClr val="C9C9C9"/>
+          </a:solidFill>
+          <a:ln w="12700">
+            <a:solidFill>
+              <a:srgbClr val="666666"/>
+            </a:solidFill>
+          </a:ln>
+          <a:effectLst/>
+        </p:spPr>
+        <p:txBody>
+          <a:bodyPr rtlCol="0" anchor="ctr"/>
+          <a:lstStyle/>
+          <a:p>
+            <a:pPr algn="ctr"/>
+          </a:p>
+        </p:txBody>
+      </p:sp>
+      <p:sp>
+        <p:nvSpPr>
+          <p:cNvPr id="58" name="TextBox 57"/>
+          <p:cNvSpPr txBox="1"/>
+          <p:nvPr/>
+        </p:nvSpPr>
+        <p:spPr>
+          <a:xfrm>
+            <a:off x="365760" y="6053328"/>
+            <a:ext cx="1463040" cy="274320"/>
+          </a:xfrm>
+          <a:prstGeom prst="rect">
+            <a:avLst/>
+          </a:prstGeom>
+          <a:noFill/>
+        </p:spPr>
+        <p:txBody>
+          <a:bodyPr wrap="square" lIns="0" rIns="0" tIns="0" bIns="0">
+            <a:spAutoFit/>
+          </a:bodyPr>
+          <a:lstStyle/>
+          <a:p>
+            <a:pPr algn="ctr"/>
+            <a:r>
+              <a:rPr sz="1300" b="1" i="1">
+                <a:solidFill>
+                  <a:srgbClr val="1F1F1E"/>
+                </a:solidFill>
+                <a:latin typeface="Times New Roman"/>
+              </a:rPr>
+              <a:t>Prompt g</a:t>
+            </a:r>
+          </a:p>
+        </p:txBody>
+      </p:sp>
+      <p:cxnSp>
+        <p:nvCxnSpPr>
+          <p:cNvPr id="59" name="Connector 58"/>
+          <p:cNvCxnSpPr/>
+          <p:nvPr/>
+        </p:nvCxnSpPr>
+        <p:spPr>
+          <a:xfrm>
+            <a:off x="1417320" y="5669280"/>
+            <a:ext cx="685800" cy="0"/>
+          </a:xfrm>
+          <a:prstGeom prst="line">
+            <a:avLst/>
+          </a:prstGeom>
+          <a:ln w="30480">
+            <a:solidFill>
+              <a:srgbClr val="333333"/>
+            </a:solidFill>
+            <a:tailEnd type="triangle" w="med" len="med"/>
+          </a:ln>
+          <a:effectLst/>
+        </p:spPr>
+      </p:cxnSp>
+      <p:sp>
+        <p:nvSpPr>
+          <p:cNvPr id="60" name="Rounded Rectangle 59"/>
+          <p:cNvSpPr/>
+          <p:nvPr/>
+        </p:nvSpPr>
+        <p:spPr>
+          <a:xfrm>
+            <a:off x="2194560" y="5349240"/>
+            <a:ext cx="841248" cy="841248"/>
+          </a:xfrm>
+          <a:prstGeom prst="roundRect">
+            <a:avLst>
+              <a:gd name="adj" fmla="val 12000"/>
+            </a:avLst>
+          </a:prstGeom>
+          <a:solidFill>
+            <a:srgbClr val="FFFFFF"/>
+          </a:solidFill>
+          <a:ln w="17780">
+            <a:solidFill>
+              <a:srgbClr val="555555"/>
+            </a:solidFill>
+          </a:ln>
+          <a:effectLst/>
+        </p:spPr>
+        <p:txBody>
+          <a:bodyPr rtlCol="0" anchor="ctr"/>
+          <a:lstStyle/>
+          <a:p>
+            <a:pPr algn="ctr"/>
+          </a:p>
+        </p:txBody>
+      </p:sp>
+      <p:sp>
+        <p:nvSpPr>
+          <p:cNvPr id="61" name="Rectangle 60"/>
+          <p:cNvSpPr/>
+          <p:nvPr/>
+        </p:nvSpPr>
+        <p:spPr>
+          <a:xfrm>
+            <a:off x="2258568" y="5413248"/>
+            <a:ext cx="186944" cy="186944"/>
+          </a:xfrm>
+          <a:prstGeom prst="rect">
+            <a:avLst/>
+          </a:prstGeom>
+          <a:solidFill>
+            <a:srgbClr val="4C72B0"/>
+          </a:solidFill>
+          <a:ln w="7620">
+            <a:solidFill>
+              <a:srgbClr val="FFFFFF"/>
+            </a:solidFill>
+          </a:ln>
+          <a:effectLst/>
+        </p:spPr>
+        <p:txBody>
+          <a:bodyPr rtlCol="0" anchor="ctr"/>
+          <a:lstStyle/>
+          <a:p>
+            <a:pPr algn="ctr"/>
+          </a:p>
+        </p:txBody>
+      </p:sp>
+      <p:sp>
+        <p:nvSpPr>
+          <p:cNvPr id="62" name="Rectangle 61"/>
+          <p:cNvSpPr/>
+          <p:nvPr/>
+        </p:nvSpPr>
+        <p:spPr>
+          <a:xfrm>
+            <a:off x="2492247" y="5413248"/>
+            <a:ext cx="186944" cy="186944"/>
+          </a:xfrm>
+          <a:prstGeom prst="rect">
+            <a:avLst/>
+          </a:prstGeom>
+          <a:solidFill>
+            <a:srgbClr val="9EC99A"/>
+          </a:solidFill>
+          <a:ln w="7620">
+            <a:solidFill>
+              <a:srgbClr val="FFFFFF"/>
+            </a:solidFill>
+          </a:ln>
+          <a:effectLst/>
+        </p:spPr>
+        <p:txBody>
+          <a:bodyPr rtlCol="0" anchor="ctr"/>
+          <a:lstStyle/>
+          <a:p>
+            <a:pPr algn="ctr"/>
+          </a:p>
+        </p:txBody>
+      </p:sp>
+      <p:sp>
+        <p:nvSpPr>
+          <p:cNvPr id="63" name="Rectangle 62"/>
+          <p:cNvSpPr/>
+          <p:nvPr/>
+        </p:nvSpPr>
+        <p:spPr>
+          <a:xfrm>
+            <a:off x="2725927" y="5413248"/>
+            <a:ext cx="186944" cy="186944"/>
+          </a:xfrm>
+          <a:prstGeom prst="rect">
+            <a:avLst/>
+          </a:prstGeom>
+          <a:solidFill>
+            <a:srgbClr val="F2B98F"/>
+          </a:solidFill>
+          <a:ln w="7620">
+            <a:solidFill>
+              <a:srgbClr val="FFFFFF"/>
+            </a:solidFill>
+          </a:ln>
+          <a:effectLst/>
+        </p:spPr>
+        <p:txBody>
+          <a:bodyPr rtlCol="0" anchor="ctr"/>
+          <a:lstStyle/>
+          <a:p>
+            <a:pPr algn="ctr"/>
+          </a:p>
+        </p:txBody>
+      </p:sp>
+      <p:sp>
+        <p:nvSpPr>
+          <p:cNvPr id="64" name="Rectangle 63"/>
+          <p:cNvSpPr/>
+          <p:nvPr/>
+        </p:nvSpPr>
+        <p:spPr>
+          <a:xfrm>
+            <a:off x="2258568" y="5646928"/>
+            <a:ext cx="186944" cy="186944"/>
+          </a:xfrm>
+          <a:prstGeom prst="rect">
+            <a:avLst/>
+          </a:prstGeom>
+          <a:solidFill>
+            <a:srgbClr val="9EC99A"/>
+          </a:solidFill>
+          <a:ln w="7620">
+            <a:solidFill>
+              <a:srgbClr val="FFFFFF"/>
+            </a:solidFill>
+          </a:ln>
+          <a:effectLst/>
+        </p:spPr>
+        <p:txBody>
+          <a:bodyPr rtlCol="0" anchor="ctr"/>
+          <a:lstStyle/>
+          <a:p>
+            <a:pPr algn="ctr"/>
+          </a:p>
+        </p:txBody>
+      </p:sp>
+      <p:sp>
+        <p:nvSpPr>
+          <p:cNvPr id="65" name="Rectangle 64"/>
+          <p:cNvSpPr/>
+          <p:nvPr/>
+        </p:nvSpPr>
+        <p:spPr>
+          <a:xfrm>
+            <a:off x="2492247" y="5646928"/>
+            <a:ext cx="186944" cy="186944"/>
+          </a:xfrm>
+          <a:prstGeom prst="rect">
+            <a:avLst/>
+          </a:prstGeom>
+          <a:solidFill>
+            <a:srgbClr val="F2B98F"/>
+          </a:solidFill>
+          <a:ln w="7620">
+            <a:solidFill>
+              <a:srgbClr val="FFFFFF"/>
+            </a:solidFill>
+          </a:ln>
+          <a:effectLst/>
+        </p:spPr>
+        <p:txBody>
+          <a:bodyPr rtlCol="0" anchor="ctr"/>
+          <a:lstStyle/>
+          <a:p>
+            <a:pPr algn="ctr"/>
+          </a:p>
+        </p:txBody>
+      </p:sp>
+      <p:sp>
+        <p:nvSpPr>
+          <p:cNvPr id="66" name="Rectangle 65"/>
+          <p:cNvSpPr/>
+          <p:nvPr/>
+        </p:nvSpPr>
+        <p:spPr>
+          <a:xfrm>
+            <a:off x="2725927" y="5646928"/>
+            <a:ext cx="186944" cy="186944"/>
+          </a:xfrm>
+          <a:prstGeom prst="rect">
+            <a:avLst/>
+          </a:prstGeom>
+          <a:solidFill>
+            <a:srgbClr val="4C72B0"/>
+          </a:solidFill>
+          <a:ln w="7620">
+            <a:solidFill>
+              <a:srgbClr val="FFFFFF"/>
+            </a:solidFill>
+          </a:ln>
+          <a:effectLst/>
+        </p:spPr>
+        <p:txBody>
+          <a:bodyPr rtlCol="0" anchor="ctr"/>
+          <a:lstStyle/>
+          <a:p>
+            <a:pPr algn="ctr"/>
+          </a:p>
+        </p:txBody>
+      </p:sp>
+      <p:sp>
+        <p:nvSpPr>
+          <p:cNvPr id="67" name="Rectangle 66"/>
+          <p:cNvSpPr/>
+          <p:nvPr/>
+        </p:nvSpPr>
+        <p:spPr>
+          <a:xfrm>
+            <a:off x="2258568" y="5880608"/>
+            <a:ext cx="186944" cy="186944"/>
+          </a:xfrm>
+          <a:prstGeom prst="rect">
+            <a:avLst/>
+          </a:prstGeom>
+          <a:solidFill>
+            <a:srgbClr val="F2B98F"/>
+          </a:solidFill>
+          <a:ln w="7620">
+            <a:solidFill>
+              <a:srgbClr val="FFFFFF"/>
+            </a:solidFill>
+          </a:ln>
+          <a:effectLst/>
+        </p:spPr>
+        <p:txBody>
+          <a:bodyPr rtlCol="0" anchor="ctr"/>
+          <a:lstStyle/>
+          <a:p>
+            <a:pPr algn="ctr"/>
+          </a:p>
+        </p:txBody>
+      </p:sp>
+      <p:sp>
+        <p:nvSpPr>
+          <p:cNvPr id="68" name="Rectangle 67"/>
+          <p:cNvSpPr/>
+          <p:nvPr/>
+        </p:nvSpPr>
+        <p:spPr>
+          <a:xfrm>
+            <a:off x="2492247" y="5880608"/>
+            <a:ext cx="186944" cy="186944"/>
+          </a:xfrm>
+          <a:prstGeom prst="rect">
+            <a:avLst/>
+          </a:prstGeom>
+          <a:solidFill>
+            <a:srgbClr val="4C72B0"/>
+          </a:solidFill>
+          <a:ln w="7620">
+            <a:solidFill>
+              <a:srgbClr val="FFFFFF"/>
+            </a:solidFill>
+          </a:ln>
+          <a:effectLst/>
+        </p:spPr>
+        <p:txBody>
+          <a:bodyPr rtlCol="0" anchor="ctr"/>
+          <a:lstStyle/>
+          <a:p>
+            <a:pPr algn="ctr"/>
+          </a:p>
+        </p:txBody>
+      </p:sp>
+      <p:sp>
+        <p:nvSpPr>
+          <p:cNvPr id="69" name="Rectangle 68"/>
+          <p:cNvSpPr/>
+          <p:nvPr/>
+        </p:nvSpPr>
+        <p:spPr>
+          <a:xfrm>
+            <a:off x="2725927" y="5880608"/>
+            <a:ext cx="186944" cy="186944"/>
+          </a:xfrm>
+          <a:prstGeom prst="rect">
+            <a:avLst/>
+          </a:prstGeom>
+          <a:solidFill>
+            <a:srgbClr val="9EC99A"/>
+          </a:solidFill>
+          <a:ln w="7620">
+            <a:solidFill>
+              <a:srgbClr val="FFFFFF"/>
+            </a:solidFill>
+          </a:ln>
+          <a:effectLst/>
+        </p:spPr>
+        <p:txBody>
+          <a:bodyPr rtlCol="0" anchor="ctr"/>
+          <a:lstStyle/>
+          <a:p>
+            <a:pPr algn="ctr"/>
+          </a:p>
+        </p:txBody>
+      </p:sp>
+      <p:sp>
+        <p:nvSpPr>
+          <p:cNvPr id="70" name="TextBox 69"/>
+          <p:cNvSpPr txBox="1"/>
+          <p:nvPr/>
+        </p:nvSpPr>
+        <p:spPr>
+          <a:xfrm>
+            <a:off x="1874519" y="6144768"/>
+            <a:ext cx="1554480" cy="274320"/>
+          </a:xfrm>
+          <a:prstGeom prst="rect">
+            <a:avLst/>
+          </a:prstGeom>
+          <a:noFill/>
+        </p:spPr>
+        <p:txBody>
+          <a:bodyPr wrap="square" lIns="0" rIns="0" tIns="0" bIns="0">
+            <a:spAutoFit/>
+          </a:bodyPr>
+          <a:lstStyle/>
+          <a:p>
+            <a:pPr algn="ctr"/>
+            <a:r>
+              <a:rPr sz="1300" b="1" i="1">
+                <a:solidFill>
+                  <a:srgbClr val="1F1F1E"/>
+                </a:solidFill>
+                <a:latin typeface="Times New Roman"/>
+              </a:rPr>
+              <a:t>Ridge Map</a:t>
+            </a:r>
+          </a:p>
+        </p:txBody>
+      </p:sp>
+      <p:cxnSp>
+        <p:nvCxnSpPr>
+          <p:cNvPr id="71" name="Connector 70"/>
+          <p:cNvCxnSpPr/>
+          <p:nvPr/>
+        </p:nvCxnSpPr>
+        <p:spPr>
+          <a:xfrm>
+            <a:off x="2971800" y="5669280"/>
+            <a:ext cx="685800" cy="0"/>
+          </a:xfrm>
+          <a:prstGeom prst="line">
+            <a:avLst/>
+          </a:prstGeom>
+          <a:ln w="30480">
+            <a:solidFill>
+              <a:srgbClr val="333333"/>
+            </a:solidFill>
+            <a:tailEnd type="triangle" w="med" len="med"/>
+          </a:ln>
+          <a:effectLst/>
+        </p:spPr>
+      </p:cxnSp>
+      <p:cxnSp>
+        <p:nvCxnSpPr>
+          <p:cNvPr id="72" name="Connector 71"/>
+          <p:cNvCxnSpPr/>
+          <p:nvPr/>
+        </p:nvCxnSpPr>
+        <p:spPr>
+          <a:xfrm>
+            <a:off x="3794760" y="5897880"/>
+            <a:ext cx="658368" cy="0"/>
+          </a:xfrm>
+          <a:prstGeom prst="line">
+            <a:avLst/>
+          </a:prstGeom>
+          <a:ln w="17780">
+            <a:solidFill>
+              <a:srgbClr val="555555"/>
+            </a:solidFill>
+          </a:ln>
+          <a:effectLst/>
+        </p:spPr>
+      </p:cxnSp>
+      <p:sp>
+        <p:nvSpPr>
+          <p:cNvPr id="73" name="Rectangle 72"/>
+          <p:cNvSpPr/>
+          <p:nvPr/>
+        </p:nvSpPr>
+        <p:spPr>
+          <a:xfrm>
+            <a:off x="3840480" y="5394960"/>
+            <a:ext cx="155448" cy="502920"/>
+          </a:xfrm>
+          <a:prstGeom prst="rect">
+            <a:avLst/>
+          </a:prstGeom>
+          <a:solidFill>
+            <a:srgbClr val="9EC99A"/>
+          </a:solidFill>
+          <a:ln w="12700">
+            <a:solidFill>
+              <a:srgbClr val="666666"/>
+            </a:solidFill>
+          </a:ln>
+          <a:effectLst/>
+        </p:spPr>
+        <p:txBody>
+          <a:bodyPr rtlCol="0" anchor="ctr"/>
+          <a:lstStyle/>
+          <a:p>
+            <a:pPr algn="ctr"/>
+          </a:p>
+        </p:txBody>
+      </p:sp>
+      <p:sp>
+        <p:nvSpPr>
+          <p:cNvPr id="74" name="Rectangle 73"/>
+          <p:cNvSpPr/>
+          <p:nvPr/>
+        </p:nvSpPr>
+        <p:spPr>
+          <a:xfrm>
+            <a:off x="4046220" y="5669280"/>
+            <a:ext cx="155448" cy="228600"/>
+          </a:xfrm>
+          <a:prstGeom prst="rect">
+            <a:avLst/>
+          </a:prstGeom>
+          <a:solidFill>
+            <a:srgbClr val="9EC99A"/>
+          </a:solidFill>
+          <a:ln w="12700">
+            <a:solidFill>
+              <a:srgbClr val="666666"/>
+            </a:solidFill>
+          </a:ln>
+          <a:effectLst/>
+        </p:spPr>
+        <p:txBody>
+          <a:bodyPr rtlCol="0" anchor="ctr"/>
+          <a:lstStyle/>
+          <a:p>
+            <a:pPr algn="ctr"/>
+          </a:p>
+        </p:txBody>
+      </p:sp>
+      <p:sp>
+        <p:nvSpPr>
+          <p:cNvPr id="75" name="Rectangle 74"/>
+          <p:cNvSpPr/>
+          <p:nvPr/>
+        </p:nvSpPr>
+        <p:spPr>
+          <a:xfrm>
+            <a:off x="4251960" y="5513832"/>
+            <a:ext cx="155448" cy="384048"/>
+          </a:xfrm>
+          <a:prstGeom prst="rect">
+            <a:avLst/>
+          </a:prstGeom>
+          <a:solidFill>
+            <a:srgbClr val="9EC99A"/>
+          </a:solidFill>
+          <a:ln w="12700">
+            <a:solidFill>
+              <a:srgbClr val="666666"/>
+            </a:solidFill>
+          </a:ln>
+          <a:effectLst/>
+        </p:spPr>
+        <p:txBody>
+          <a:bodyPr rtlCol="0" anchor="ctr"/>
+          <a:lstStyle/>
+          <a:p>
+            <a:pPr algn="ctr"/>
+          </a:p>
+        </p:txBody>
+      </p:sp>
+      <p:sp>
+        <p:nvSpPr>
+          <p:cNvPr id="76" name="TextBox 75"/>
+          <p:cNvSpPr txBox="1"/>
+          <p:nvPr/>
+        </p:nvSpPr>
+        <p:spPr>
+          <a:xfrm>
+            <a:off x="3520440" y="6053328"/>
+            <a:ext cx="1920240" cy="274320"/>
+          </a:xfrm>
+          <a:prstGeom prst="rect">
+            <a:avLst/>
+          </a:prstGeom>
+          <a:noFill/>
+        </p:spPr>
+        <p:txBody>
+          <a:bodyPr wrap="square" lIns="0" rIns="0" tIns="0" bIns="0">
+            <a:spAutoFit/>
+          </a:bodyPr>
+          <a:lstStyle/>
+          <a:p>
+            <a:pPr algn="ctr"/>
+            <a:r>
+              <a:rPr sz="1300" b="1" i="1">
+                <a:solidFill>
+                  <a:srgbClr val="1F1F1E"/>
+                </a:solidFill>
+                <a:latin typeface="Times New Roman"/>
+              </a:rPr>
+              <a:t>Predicted Skills</a:t>
+            </a:r>
+          </a:p>
+        </p:txBody>
+      </p:sp>
+      <p:sp>
+        <p:nvSpPr>
+          <p:cNvPr id="77" name="TextBox 76"/>
+          <p:cNvSpPr txBox="1"/>
+          <p:nvPr/>
+        </p:nvSpPr>
+        <p:spPr>
+          <a:xfrm>
+            <a:off x="6217920" y="219456"/>
+            <a:ext cx="5669280" cy="274320"/>
+          </a:xfrm>
+          <a:prstGeom prst="rect">
+            <a:avLst/>
+          </a:prstGeom>
+          <a:noFill/>
+        </p:spPr>
+        <p:txBody>
+          <a:bodyPr wrap="square" lIns="0" rIns="0" tIns="0" bIns="0">
+            <a:spAutoFit/>
+          </a:bodyPr>
+          <a:lstStyle/>
+          <a:p>
+            <a:pPr algn="l"/>
+            <a:r>
+              <a:rPr sz="1900" b="1" i="1">
+                <a:solidFill>
+                  <a:srgbClr val="1F1F1E"/>
+                </a:solidFill>
+                <a:latin typeface="Times New Roman"/>
+              </a:rPr>
+              <a:t>Spending the budget where demand is unmet</a:t>
+            </a:r>
+          </a:p>
+        </p:txBody>
+      </p:sp>
+      <p:sp>
+        <p:nvSpPr>
+          <p:cNvPr id="78" name="Rounded Rectangle 77"/>
+          <p:cNvSpPr/>
+          <p:nvPr/>
+        </p:nvSpPr>
+        <p:spPr>
+          <a:xfrm>
+            <a:off x="6263640" y="681228"/>
+            <a:ext cx="1188720" cy="1051560"/>
+          </a:xfrm>
+          <a:prstGeom prst="roundRect">
+            <a:avLst>
+              <a:gd name="adj" fmla="val 25000"/>
+            </a:avLst>
+          </a:prstGeom>
+          <a:solidFill>
+            <a:srgbClr val="EEF2F9"/>
+          </a:solidFill>
+          <a:ln w="20320">
+            <a:solidFill>
+              <a:srgbClr val="8A5AA8"/>
+            </a:solidFill>
+          </a:ln>
+          <a:effectLst/>
+        </p:spPr>
+        <p:txBody>
+          <a:bodyPr rtlCol="0" anchor="ctr"/>
+          <a:lstStyle/>
+          <a:p>
+            <a:pPr algn="ctr"/>
+          </a:p>
+        </p:txBody>
+      </p:sp>
+      <p:sp>
+        <p:nvSpPr>
+          <p:cNvPr id="79" name="Rectangle 78"/>
+          <p:cNvSpPr/>
+          <p:nvPr/>
+        </p:nvSpPr>
+        <p:spPr>
+          <a:xfrm>
+            <a:off x="6847027" y="553212"/>
+            <a:ext cx="21945" cy="128016"/>
+          </a:xfrm>
+          <a:prstGeom prst="rect">
+            <a:avLst/>
+          </a:prstGeom>
+          <a:solidFill>
+            <a:srgbClr val="8A5AA8"/>
+          </a:solidFill>
+          <a:ln>
+            <a:noFill/>
+          </a:ln>
+          <a:effectLst/>
+        </p:spPr>
+        <p:txBody>
+          <a:bodyPr rtlCol="0" anchor="ctr"/>
+          <a:lstStyle/>
+          <a:p>
+            <a:pPr algn="ctr"/>
+          </a:p>
+        </p:txBody>
+      </p:sp>
+      <p:sp>
+        <p:nvSpPr>
+          <p:cNvPr id="80" name="Oval 79"/>
+          <p:cNvSpPr/>
+          <p:nvPr/>
+        </p:nvSpPr>
+        <p:spPr>
+          <a:xfrm>
+            <a:off x="6812280" y="461772"/>
+            <a:ext cx="91440" cy="91440"/>
+          </a:xfrm>
+          <a:prstGeom prst="ellipse">
+            <a:avLst/>
+          </a:prstGeom>
+          <a:solidFill>
+            <a:srgbClr val="8A5AA8"/>
+          </a:solidFill>
+          <a:ln>
+            <a:noFill/>
+          </a:ln>
+          <a:effectLst/>
+        </p:spPr>
+        <p:txBody>
+          <a:bodyPr rtlCol="0" anchor="ctr"/>
+          <a:lstStyle/>
+          <a:p>
+            <a:pPr algn="ctr"/>
+          </a:p>
+        </p:txBody>
+      </p:sp>
+      <p:sp>
+        <p:nvSpPr>
+          <p:cNvPr id="81" name="Oval 80"/>
+          <p:cNvSpPr/>
+          <p:nvPr/>
+        </p:nvSpPr>
+        <p:spPr>
+          <a:xfrm>
+            <a:off x="6602882" y="1060704"/>
+            <a:ext cx="82296" cy="82296"/>
+          </a:xfrm>
+          <a:prstGeom prst="ellipse">
+            <a:avLst/>
+          </a:prstGeom>
+          <a:solidFill>
+            <a:srgbClr val="8A5AA8"/>
+          </a:solidFill>
+          <a:ln>
+            <a:noFill/>
+          </a:ln>
+          <a:effectLst/>
+        </p:spPr>
+        <p:txBody>
+          <a:bodyPr rtlCol="0" anchor="ctr"/>
+          <a:lstStyle/>
+          <a:p>
+            <a:pPr algn="ctr"/>
+          </a:p>
+        </p:txBody>
+      </p:sp>
+      <p:sp>
+        <p:nvSpPr>
+          <p:cNvPr id="82" name="Oval 81"/>
+          <p:cNvSpPr/>
+          <p:nvPr/>
+        </p:nvSpPr>
+        <p:spPr>
+          <a:xfrm>
+            <a:off x="7030821" y="1060704"/>
+            <a:ext cx="82296" cy="82296"/>
+          </a:xfrm>
+          <a:prstGeom prst="ellipse">
+            <a:avLst/>
+          </a:prstGeom>
+          <a:solidFill>
+            <a:srgbClr val="8A5AA8"/>
+          </a:solidFill>
+          <a:ln>
+            <a:noFill/>
+          </a:ln>
+          <a:effectLst/>
+        </p:spPr>
+        <p:txBody>
+          <a:bodyPr rtlCol="0" anchor="ctr"/>
+          <a:lstStyle/>
+          <a:p>
+            <a:pPr algn="ctr"/>
+          </a:p>
+        </p:txBody>
+      </p:sp>
+      <p:sp>
+        <p:nvSpPr>
+          <p:cNvPr id="83" name="Rounded Rectangle 82"/>
+          <p:cNvSpPr/>
+          <p:nvPr/>
+        </p:nvSpPr>
+        <p:spPr>
+          <a:xfrm>
+            <a:off x="6691579" y="1333195"/>
+            <a:ext cx="332841" cy="27432"/>
+          </a:xfrm>
+          <a:prstGeom prst="roundRect">
+            <a:avLst>
+              <a:gd name="adj" fmla="val 50000"/>
+            </a:avLst>
+          </a:prstGeom>
+          <a:solidFill>
+            <a:srgbClr val="8A5AA8"/>
+          </a:solidFill>
+          <a:ln>
+            <a:noFill/>
+          </a:ln>
+          <a:effectLst/>
+        </p:spPr>
+        <p:txBody>
+          <a:bodyPr rtlCol="0" anchor="ctr"/>
+          <a:lstStyle/>
+          <a:p>
+            <a:pPr algn="ctr"/>
+          </a:p>
+        </p:txBody>
+      </p:sp>
+      <p:sp>
+        <p:nvSpPr>
+          <p:cNvPr id="84" name="TextBox 83"/>
+          <p:cNvSpPr txBox="1"/>
+          <p:nvPr/>
+        </p:nvSpPr>
+        <p:spPr>
+          <a:xfrm>
+            <a:off x="5943600" y="1769364"/>
+            <a:ext cx="1828800" cy="256032"/>
+          </a:xfrm>
+          <a:prstGeom prst="rect">
+            <a:avLst/>
+          </a:prstGeom>
+          <a:noFill/>
+        </p:spPr>
+        <p:txBody>
+          <a:bodyPr wrap="square" lIns="0" rIns="0" tIns="0" bIns="0">
+            <a:spAutoFit/>
+          </a:bodyPr>
+          <a:lstStyle/>
+          <a:p>
+            <a:pPr algn="ctr"/>
+            <a:r>
+              <a:rPr sz="1300" b="1" i="0">
+                <a:solidFill>
+                  <a:srgbClr val="1F1F1E"/>
+                </a:solidFill>
+                <a:latin typeface="Times New Roman"/>
+              </a:rPr>
+              <a:t>Teacher API</a:t>
+            </a:r>
+          </a:p>
+        </p:txBody>
+      </p:sp>
+      <p:sp>
+        <p:nvSpPr>
+          <p:cNvPr id="85" name="Oval 84"/>
+          <p:cNvSpPr/>
+          <p:nvPr/>
+        </p:nvSpPr>
+        <p:spPr>
+          <a:xfrm>
+            <a:off x="7543800" y="1188720"/>
+            <a:ext cx="310896" cy="77724"/>
+          </a:xfrm>
+          <a:prstGeom prst="ellipse">
+            <a:avLst/>
+          </a:prstGeom>
+          <a:solidFill>
+            <a:srgbClr val="E8C56A"/>
+          </a:solidFill>
+          <a:ln w="12700">
+            <a:solidFill>
+              <a:srgbClr val="9A7B2E"/>
+            </a:solidFill>
+          </a:ln>
+          <a:effectLst/>
+        </p:spPr>
+        <p:txBody>
+          <a:bodyPr rtlCol="0" anchor="ctr"/>
+          <a:lstStyle/>
+          <a:p>
+            <a:pPr algn="ctr"/>
+          </a:p>
+        </p:txBody>
+      </p:sp>
+      <p:sp>
+        <p:nvSpPr>
+          <p:cNvPr id="86" name="Oval 85"/>
+          <p:cNvSpPr/>
+          <p:nvPr/>
+        </p:nvSpPr>
+        <p:spPr>
+          <a:xfrm>
+            <a:off x="7543800" y="1078992"/>
+            <a:ext cx="310896" cy="77724"/>
+          </a:xfrm>
+          <a:prstGeom prst="ellipse">
+            <a:avLst/>
+          </a:prstGeom>
+          <a:solidFill>
+            <a:srgbClr val="E8C56A"/>
+          </a:solidFill>
+          <a:ln w="12700">
+            <a:solidFill>
+              <a:srgbClr val="9A7B2E"/>
+            </a:solidFill>
+          </a:ln>
+          <a:effectLst/>
+        </p:spPr>
+        <p:txBody>
+          <a:bodyPr rtlCol="0" anchor="ctr"/>
+          <a:lstStyle/>
+          <a:p>
+            <a:pPr algn="ctr"/>
+          </a:p>
+        </p:txBody>
+      </p:sp>
+      <p:sp>
+        <p:nvSpPr>
+          <p:cNvPr id="87" name="Oval 86"/>
+          <p:cNvSpPr/>
+          <p:nvPr/>
+        </p:nvSpPr>
+        <p:spPr>
+          <a:xfrm>
+            <a:off x="7543800" y="969264"/>
+            <a:ext cx="310896" cy="77724"/>
+          </a:xfrm>
+          <a:prstGeom prst="ellipse">
+            <a:avLst/>
+          </a:prstGeom>
+          <a:solidFill>
+            <a:srgbClr val="E8C56A"/>
+          </a:solidFill>
+          <a:ln w="12700">
+            <a:solidFill>
+              <a:srgbClr val="9A7B2E"/>
+            </a:solidFill>
+          </a:ln>
+          <a:effectLst/>
+        </p:spPr>
+        <p:txBody>
+          <a:bodyPr rtlCol="0" anchor="ctr"/>
+          <a:lstStyle/>
+          <a:p>
+            <a:pPr algn="ctr"/>
+          </a:p>
+        </p:txBody>
+      </p:sp>
+      <p:sp>
+        <p:nvSpPr>
+          <p:cNvPr id="88" name="Oval 87"/>
+          <p:cNvSpPr/>
+          <p:nvPr/>
+        </p:nvSpPr>
+        <p:spPr>
+          <a:xfrm>
+            <a:off x="7543800" y="859536"/>
+            <a:ext cx="310896" cy="77724"/>
+          </a:xfrm>
+          <a:prstGeom prst="ellipse">
+            <a:avLst/>
+          </a:prstGeom>
+          <a:solidFill>
+            <a:srgbClr val="E8C56A"/>
+          </a:solidFill>
+          <a:ln w="12700">
+            <a:solidFill>
+              <a:srgbClr val="9A7B2E"/>
+            </a:solidFill>
+          </a:ln>
+          <a:effectLst/>
+        </p:spPr>
+        <p:txBody>
+          <a:bodyPr rtlCol="0" anchor="ctr"/>
+          <a:lstStyle/>
+          <a:p>
+            <a:pPr algn="ctr"/>
+          </a:p>
+        </p:txBody>
+      </p:sp>
+      <p:sp>
+        <p:nvSpPr>
+          <p:cNvPr id="89" name="TextBox 88"/>
+          <p:cNvSpPr txBox="1"/>
+          <p:nvPr/>
+        </p:nvSpPr>
+        <p:spPr>
+          <a:xfrm>
+            <a:off x="7360920" y="1371600"/>
+            <a:ext cx="822960" cy="274320"/>
+          </a:xfrm>
+          <a:prstGeom prst="rect">
+            <a:avLst/>
+          </a:prstGeom>
+          <a:noFill/>
+        </p:spPr>
+        <p:txBody>
+          <a:bodyPr wrap="square" lIns="0" rIns="0" tIns="0" bIns="0">
+            <a:spAutoFit/>
+          </a:bodyPr>
+          <a:lstStyle/>
+          <a:p>
+            <a:pPr algn="ctr"/>
+            <a:r>
+              <a:rPr sz="1500" b="1" i="1">
+                <a:solidFill>
+                  <a:srgbClr val="1F1F1E"/>
+                </a:solidFill>
+                <a:latin typeface="Times New Roman"/>
+              </a:rPr>
+              <a:t>b</a:t>
+            </a:r>
+          </a:p>
+        </p:txBody>
+      </p:sp>
+      <p:cxnSp>
+        <p:nvCxnSpPr>
+          <p:cNvPr id="90" name="Connector 89"/>
+          <p:cNvCxnSpPr/>
+          <p:nvPr/>
+        </p:nvCxnSpPr>
+        <p:spPr>
+          <a:xfrm>
+            <a:off x="7635240" y="1234440"/>
+            <a:ext cx="502920" cy="0"/>
+          </a:xfrm>
+          <a:prstGeom prst="line">
+            <a:avLst/>
+          </a:prstGeom>
+          <a:ln w="30480">
+            <a:solidFill>
+              <a:srgbClr val="333333"/>
+            </a:solidFill>
+            <a:tailEnd type="triangle" w="med" len="med"/>
+          </a:ln>
+          <a:effectLst/>
+        </p:spPr>
+      </p:cxnSp>
+      <p:cxnSp>
+        <p:nvCxnSpPr>
+          <p:cNvPr id="91" name="Connector 90"/>
+          <p:cNvCxnSpPr/>
+          <p:nvPr/>
+        </p:nvCxnSpPr>
+        <p:spPr>
+          <a:xfrm>
+            <a:off x="8229600" y="1600200"/>
+            <a:ext cx="658368" cy="0"/>
+          </a:xfrm>
+          <a:prstGeom prst="line">
+            <a:avLst/>
+          </a:prstGeom>
+          <a:ln w="17780">
+            <a:solidFill>
+              <a:srgbClr val="555555"/>
+            </a:solidFill>
+          </a:ln>
+          <a:effectLst/>
+        </p:spPr>
+      </p:cxnSp>
+      <p:sp>
+        <p:nvSpPr>
+          <p:cNvPr id="92" name="Rectangle 91"/>
+          <p:cNvSpPr/>
+          <p:nvPr/>
+        </p:nvSpPr>
+        <p:spPr>
+          <a:xfrm>
+            <a:off x="8275320" y="1216152"/>
+            <a:ext cx="155448" cy="384048"/>
+          </a:xfrm>
+          <a:prstGeom prst="rect">
+            <a:avLst/>
+          </a:prstGeom>
+          <a:solidFill>
+            <a:srgbClr val="9EC99A"/>
+          </a:solidFill>
+          <a:ln w="12700">
+            <a:solidFill>
+              <a:srgbClr val="666666"/>
+            </a:solidFill>
+          </a:ln>
+          <a:effectLst/>
+        </p:spPr>
+        <p:txBody>
+          <a:bodyPr rtlCol="0" anchor="ctr"/>
+          <a:lstStyle/>
+          <a:p>
+            <a:pPr algn="ctr"/>
+          </a:p>
+        </p:txBody>
+      </p:sp>
+      <p:sp>
+        <p:nvSpPr>
+          <p:cNvPr id="93" name="Rectangle 92"/>
+          <p:cNvSpPr/>
+          <p:nvPr/>
+        </p:nvSpPr>
+        <p:spPr>
+          <a:xfrm>
+            <a:off x="8481060" y="1417320"/>
+            <a:ext cx="155448" cy="182880"/>
+          </a:xfrm>
+          <a:prstGeom prst="rect">
+            <a:avLst/>
+          </a:prstGeom>
+          <a:solidFill>
+            <a:srgbClr val="9EC99A"/>
+          </a:solidFill>
+          <a:ln w="12700">
+            <a:solidFill>
+              <a:srgbClr val="666666"/>
+            </a:solidFill>
+          </a:ln>
+          <a:effectLst/>
+        </p:spPr>
+        <p:txBody>
+          <a:bodyPr rtlCol="0" anchor="ctr"/>
+          <a:lstStyle/>
+          <a:p>
+            <a:pPr algn="ctr"/>
+          </a:p>
+        </p:txBody>
+      </p:sp>
+      <p:sp>
+        <p:nvSpPr>
+          <p:cNvPr id="94" name="Rectangle 93"/>
+          <p:cNvSpPr/>
+          <p:nvPr/>
+        </p:nvSpPr>
+        <p:spPr>
+          <a:xfrm>
+            <a:off x="8686800" y="1289304"/>
+            <a:ext cx="155448" cy="310896"/>
+          </a:xfrm>
+          <a:prstGeom prst="rect">
+            <a:avLst/>
+          </a:prstGeom>
+          <a:solidFill>
+            <a:srgbClr val="9EC99A"/>
+          </a:solidFill>
+          <a:ln w="12700">
+            <a:solidFill>
+              <a:srgbClr val="666666"/>
+            </a:solidFill>
+          </a:ln>
+          <a:effectLst/>
+        </p:spPr>
+        <p:txBody>
+          <a:bodyPr rtlCol="0" anchor="ctr"/>
+          <a:lstStyle/>
+          <a:p>
+            <a:pPr algn="ctr"/>
+          </a:p>
+        </p:txBody>
+      </p:sp>
+      <p:sp>
+        <p:nvSpPr>
+          <p:cNvPr id="95" name="TextBox 94"/>
+          <p:cNvSpPr txBox="1"/>
+          <p:nvPr/>
+        </p:nvSpPr>
+        <p:spPr>
+          <a:xfrm>
+            <a:off x="7909560" y="1755648"/>
+            <a:ext cx="1645920" cy="274320"/>
+          </a:xfrm>
+          <a:prstGeom prst="rect">
+            <a:avLst/>
+          </a:prstGeom>
+          <a:noFill/>
+        </p:spPr>
+        <p:txBody>
+          <a:bodyPr wrap="square" lIns="0" rIns="0" tIns="0" bIns="0">
+            <a:spAutoFit/>
+          </a:bodyPr>
+          <a:lstStyle/>
+          <a:p>
+            <a:pPr algn="ctr"/>
+            <a:r>
+              <a:rPr sz="1300" b="1" i="1">
+                <a:solidFill>
+                  <a:srgbClr val="1F1F1E"/>
+                </a:solidFill>
+                <a:latin typeface="Times New Roman"/>
+              </a:rPr>
+              <a:t>ŝ(x) predicted</a:t>
+            </a:r>
+          </a:p>
+        </p:txBody>
+      </p:sp>
+      <p:cxnSp>
+        <p:nvCxnSpPr>
+          <p:cNvPr id="96" name="Connector 95"/>
+          <p:cNvCxnSpPr/>
+          <p:nvPr/>
+        </p:nvCxnSpPr>
+        <p:spPr>
+          <a:xfrm>
+            <a:off x="9601200" y="1600200"/>
+            <a:ext cx="658368" cy="0"/>
+          </a:xfrm>
+          <a:prstGeom prst="line">
+            <a:avLst/>
+          </a:prstGeom>
+          <a:ln w="17780">
+            <a:solidFill>
+              <a:srgbClr val="555555"/>
+            </a:solidFill>
+          </a:ln>
+          <a:effectLst/>
+        </p:spPr>
+      </p:cxnSp>
+      <p:sp>
+        <p:nvSpPr>
+          <p:cNvPr id="97" name="Rectangle 96"/>
+          <p:cNvSpPr/>
+          <p:nvPr/>
+        </p:nvSpPr>
+        <p:spPr>
+          <a:xfrm>
+            <a:off x="9646920" y="1097280"/>
+            <a:ext cx="155448" cy="502920"/>
+          </a:xfrm>
+          <a:prstGeom prst="rect">
+            <a:avLst/>
+          </a:prstGeom>
+          <a:solidFill>
+            <a:srgbClr val="4C72B0"/>
+          </a:solidFill>
+          <a:ln w="12700">
+            <a:solidFill>
+              <a:srgbClr val="666666"/>
+            </a:solidFill>
+          </a:ln>
+          <a:effectLst/>
+        </p:spPr>
+        <p:txBody>
+          <a:bodyPr rtlCol="0" anchor="ctr"/>
+          <a:lstStyle/>
+          <a:p>
+            <a:pPr algn="ctr"/>
+          </a:p>
+        </p:txBody>
+      </p:sp>
+      <p:sp>
+        <p:nvSpPr>
+          <p:cNvPr id="98" name="Rectangle 97"/>
+          <p:cNvSpPr/>
+          <p:nvPr/>
+        </p:nvSpPr>
+        <p:spPr>
+          <a:xfrm>
+            <a:off x="9852660" y="1463040"/>
+            <a:ext cx="155448" cy="137160"/>
+          </a:xfrm>
+          <a:prstGeom prst="rect">
+            <a:avLst/>
+          </a:prstGeom>
+          <a:solidFill>
+            <a:srgbClr val="C9C9C9"/>
+          </a:solidFill>
+          <a:ln w="12700">
+            <a:solidFill>
+              <a:srgbClr val="666666"/>
+            </a:solidFill>
+          </a:ln>
+          <a:effectLst/>
+        </p:spPr>
+        <p:txBody>
+          <a:bodyPr rtlCol="0" anchor="ctr"/>
+          <a:lstStyle/>
+          <a:p>
+            <a:pPr algn="ctr"/>
+          </a:p>
+        </p:txBody>
+      </p:sp>
+      <p:sp>
+        <p:nvSpPr>
+          <p:cNvPr id="99" name="Rectangle 98"/>
+          <p:cNvSpPr/>
+          <p:nvPr/>
+        </p:nvSpPr>
+        <p:spPr>
+          <a:xfrm>
+            <a:off x="10058400" y="1325880"/>
+            <a:ext cx="155448" cy="274320"/>
+          </a:xfrm>
+          <a:prstGeom prst="rect">
+            <a:avLst/>
+          </a:prstGeom>
+          <a:solidFill>
+            <a:srgbClr val="5F9EA0"/>
+          </a:solidFill>
+          <a:ln w="12700">
+            <a:solidFill>
+              <a:srgbClr val="666666"/>
+            </a:solidFill>
+          </a:ln>
+          <a:effectLst/>
+        </p:spPr>
+        <p:txBody>
+          <a:bodyPr rtlCol="0" anchor="ctr"/>
+          <a:lstStyle/>
+          <a:p>
+            <a:pPr algn="ctr"/>
+          </a:p>
+        </p:txBody>
+      </p:sp>
+      <p:sp>
+        <p:nvSpPr>
+          <p:cNvPr id="100" name="TextBox 99"/>
+          <p:cNvSpPr txBox="1"/>
+          <p:nvPr/>
+        </p:nvSpPr>
+        <p:spPr>
+          <a:xfrm>
+            <a:off x="9235440" y="1755648"/>
+            <a:ext cx="1920240" cy="274320"/>
+          </a:xfrm>
+          <a:prstGeom prst="rect">
+            <a:avLst/>
+          </a:prstGeom>
+          <a:noFill/>
+        </p:spPr>
+        <p:txBody>
+          <a:bodyPr wrap="square" lIns="0" rIns="0" tIns="0" bIns="0">
+            <a:spAutoFit/>
+          </a:bodyPr>
+          <a:lstStyle/>
+          <a:p>
+            <a:pPr algn="ctr"/>
+            <a:r>
+              <a:rPr sz="1300" b="1" i="1">
+                <a:solidFill>
+                  <a:srgbClr val="1F1F1E"/>
+                </a:solidFill>
+                <a:latin typeface="Times New Roman"/>
+              </a:rPr>
+              <a:t>r  remaining quota</a:t>
+            </a:r>
+          </a:p>
+        </p:txBody>
+      </p:sp>
+      <p:sp>
+        <p:nvSpPr>
+          <p:cNvPr id="101" name="TextBox 100"/>
+          <p:cNvSpPr txBox="1"/>
+          <p:nvPr/>
+        </p:nvSpPr>
+        <p:spPr>
+          <a:xfrm>
+            <a:off x="10744200" y="960120"/>
+            <a:ext cx="1371600" cy="822960"/>
+          </a:xfrm>
+          <a:prstGeom prst="rect">
+            <a:avLst/>
+          </a:prstGeom>
+          <a:noFill/>
+        </p:spPr>
+        <p:txBody>
+          <a:bodyPr wrap="square" lIns="0" rIns="0" tIns="0" bIns="0">
+            <a:spAutoFit/>
+          </a:bodyPr>
+          <a:lstStyle/>
+          <a:p>
+            <a:pPr algn="ctr"/>
+            <a:r>
               <a:rPr sz="1500" b="0" i="0">
                 <a:solidFill>
                   <a:srgbClr val="1F1F1E"/>
                 </a:solidFill>
                 <a:latin typeface="Times New Roman"/>
               </a:rPr>
-              <a:t>min‖X − CD‖²  +  λ‖C‖₁</a:t>
-            </a:r>
-          </a:p>
-        </p:txBody>
-      </p:sp>
-      <p:cxnSp>
-        <p:nvCxnSpPr>
-          <p:cNvPr id="34" name="Connector 33"/>
-          <p:cNvCxnSpPr/>
-          <p:nvPr/>
-        </p:nvCxnSpPr>
-        <p:spPr>
-          <a:xfrm>
-            <a:off x="4206240" y="2331720"/>
-            <a:ext cx="0" cy="685800"/>
-          </a:xfrm>
-          <a:prstGeom prst="line">
-            <a:avLst/>
-          </a:prstGeom>
-          <a:ln w="30480">
-            <a:solidFill>
-              <a:srgbClr val="333333"/>
-            </a:solidFill>
-            <a:tailEnd type="triangle" w="med" len="med"/>
-          </a:ln>
-          <a:effectLst/>
-        </p:spPr>
-      </p:cxnSp>
-      <p:sp>
-        <p:nvSpPr>
-          <p:cNvPr id="35" name="Rounded Rectangle 34"/>
-          <p:cNvSpPr/>
-          <p:nvPr/>
-        </p:nvSpPr>
-        <p:spPr>
-          <a:xfrm>
-            <a:off x="777240" y="3154680"/>
-            <a:ext cx="365760" cy="365760"/>
-          </a:xfrm>
-          <a:prstGeom prst="roundRect">
-            <a:avLst>
-              <a:gd name="adj" fmla="val 18000"/>
-            </a:avLst>
-          </a:prstGeom>
-          <a:solidFill>
-            <a:srgbClr val="4C72B0"/>
-          </a:solidFill>
-          <a:ln w="15240">
-            <a:solidFill>
-              <a:srgbClr val="FFFFFF"/>
-            </a:solidFill>
-          </a:ln>
-          <a:effectLst/>
-        </p:spPr>
-        <p:txBody>
-          <a:bodyPr rtlCol="0" anchor="ctr"/>
-          <a:lstStyle/>
-          <a:p>
-            <a:pPr algn="ctr"/>
-          </a:p>
-        </p:txBody>
-      </p:sp>
-      <p:sp>
-        <p:nvSpPr>
-          <p:cNvPr id="36" name="Rounded Rectangle 35"/>
-          <p:cNvSpPr/>
-          <p:nvPr/>
-        </p:nvSpPr>
-        <p:spPr>
-          <a:xfrm>
-            <a:off x="1252728" y="3154680"/>
-            <a:ext cx="365760" cy="365760"/>
-          </a:xfrm>
-          <a:prstGeom prst="roundRect">
-            <a:avLst>
-              <a:gd name="adj" fmla="val 18000"/>
-            </a:avLst>
-          </a:prstGeom>
-          <a:solidFill>
-            <a:srgbClr val="5F9EA0"/>
-          </a:solidFill>
-          <a:ln w="15240">
-            <a:solidFill>
-              <a:srgbClr val="FFFFFF"/>
-            </a:solidFill>
-          </a:ln>
-          <a:effectLst/>
-        </p:spPr>
-        <p:txBody>
-          <a:bodyPr rtlCol="0" anchor="ctr"/>
-          <a:lstStyle/>
-          <a:p>
-            <a:pPr algn="ctr"/>
-          </a:p>
-        </p:txBody>
-      </p:sp>
-      <p:sp>
-        <p:nvSpPr>
-          <p:cNvPr id="37" name="Rounded Rectangle 36"/>
-          <p:cNvSpPr/>
-          <p:nvPr/>
-        </p:nvSpPr>
-        <p:spPr>
-          <a:xfrm>
-            <a:off x="1728216" y="3154680"/>
-            <a:ext cx="365760" cy="365760"/>
-          </a:xfrm>
-          <a:prstGeom prst="roundRect">
-            <a:avLst>
-              <a:gd name="adj" fmla="val 18000"/>
-            </a:avLst>
-          </a:prstGeom>
-          <a:solidFill>
-            <a:srgbClr val="7BA7D7"/>
-          </a:solidFill>
-          <a:ln w="15240">
-            <a:solidFill>
-              <a:srgbClr val="FFFFFF"/>
-            </a:solidFill>
-          </a:ln>
-          <a:effectLst/>
-        </p:spPr>
-        <p:txBody>
-          <a:bodyPr rtlCol="0" anchor="ctr"/>
-          <a:lstStyle/>
-          <a:p>
-            <a:pPr algn="ctr"/>
-          </a:p>
-        </p:txBody>
-      </p:sp>
-      <p:sp>
-        <p:nvSpPr>
-          <p:cNvPr id="38" name="Rounded Rectangle 37"/>
-          <p:cNvSpPr/>
-          <p:nvPr/>
-        </p:nvSpPr>
-        <p:spPr>
-          <a:xfrm>
-            <a:off x="2203704" y="3154680"/>
-            <a:ext cx="365760" cy="365760"/>
-          </a:xfrm>
-          <a:prstGeom prst="roundRect">
-            <a:avLst>
-              <a:gd name="adj" fmla="val 18000"/>
-            </a:avLst>
-          </a:prstGeom>
-          <a:solidFill>
-            <a:srgbClr val="F2B98F"/>
-          </a:solidFill>
-          <a:ln w="15240">
-            <a:solidFill>
-              <a:srgbClr val="FFFFFF"/>
-            </a:solidFill>
-          </a:ln>
-          <a:effectLst/>
-        </p:spPr>
-        <p:txBody>
-          <a:bodyPr rtlCol="0" anchor="ctr"/>
-          <a:lstStyle/>
-          <a:p>
-            <a:pPr algn="ctr"/>
-          </a:p>
-        </p:txBody>
-      </p:sp>
-      <p:sp>
-        <p:nvSpPr>
-          <p:cNvPr id="39" name="Rounded Rectangle 38"/>
-          <p:cNvSpPr/>
-          <p:nvPr/>
-        </p:nvSpPr>
-        <p:spPr>
-          <a:xfrm>
-            <a:off x="2679192" y="3154680"/>
-            <a:ext cx="365760" cy="365760"/>
-          </a:xfrm>
-          <a:prstGeom prst="roundRect">
-            <a:avLst>
-              <a:gd name="adj" fmla="val 18000"/>
-            </a:avLst>
-          </a:prstGeom>
-          <a:solidFill>
-            <a:srgbClr val="E29A9A"/>
-          </a:solidFill>
-          <a:ln w="15240">
-            <a:solidFill>
-              <a:srgbClr val="FFFFFF"/>
-            </a:solidFill>
-          </a:ln>
-          <a:effectLst/>
-        </p:spPr>
-        <p:txBody>
-          <a:bodyPr rtlCol="0" anchor="ctr"/>
-          <a:lstStyle/>
-          <a:p>
-            <a:pPr algn="ctr"/>
-          </a:p>
-        </p:txBody>
-      </p:sp>
-      <p:sp>
-        <p:nvSpPr>
-          <p:cNvPr id="40" name="TextBox 39"/>
-          <p:cNvSpPr txBox="1"/>
-          <p:nvPr/>
-        </p:nvSpPr>
-        <p:spPr>
-          <a:xfrm>
-            <a:off x="566928" y="3611880"/>
-            <a:ext cx="2926080" cy="274320"/>
-          </a:xfrm>
-          <a:prstGeom prst="rect">
-            <a:avLst/>
-          </a:prstGeom>
-          <a:noFill/>
-        </p:spPr>
-        <p:txBody>
-          <a:bodyPr wrap="square" lIns="0" rIns="0" tIns="0" bIns="0">
-            <a:spAutoFit/>
-          </a:bodyPr>
-          <a:lstStyle/>
-          <a:p>
-            <a:pPr algn="ctr"/>
-            <a:r>
-              <a:rPr sz="1100" b="1" i="1">
-                <a:solidFill>
-                  <a:srgbClr val="1F1F1E"/>
-                </a:solidFill>
-                <a:latin typeface="Times New Roman"/>
-              </a:rPr>
-              <a:t>Capability Atoms (dictionary D)</a:t>
-            </a:r>
-          </a:p>
-        </p:txBody>
-      </p:sp>
-      <p:cxnSp>
-        <p:nvCxnSpPr>
-          <p:cNvPr id="41" name="Connector 40"/>
-          <p:cNvCxnSpPr/>
-          <p:nvPr/>
-        </p:nvCxnSpPr>
-        <p:spPr>
-          <a:xfrm>
-            <a:off x="3291840" y="3337560"/>
-            <a:ext cx="594360" cy="0"/>
-          </a:xfrm>
-          <a:prstGeom prst="line">
-            <a:avLst/>
-          </a:prstGeom>
-          <a:ln w="30480">
-            <a:solidFill>
-              <a:srgbClr val="333333"/>
-            </a:solidFill>
-            <a:tailEnd type="triangle" w="med" len="med"/>
-          </a:ln>
-          <a:effectLst/>
-        </p:spPr>
-      </p:cxnSp>
-      <p:cxnSp>
-        <p:nvCxnSpPr>
-          <p:cNvPr id="42" name="Connector 41"/>
-          <p:cNvCxnSpPr/>
-          <p:nvPr/>
-        </p:nvCxnSpPr>
-        <p:spPr>
-          <a:xfrm>
-            <a:off x="3977640" y="3730752"/>
-            <a:ext cx="690372" cy="0"/>
-          </a:xfrm>
-          <a:prstGeom prst="line">
-            <a:avLst/>
-          </a:prstGeom>
-          <a:ln w="11430">
-            <a:solidFill>
-              <a:srgbClr val="E4E4E4"/>
-            </a:solidFill>
-          </a:ln>
-          <a:effectLst/>
-        </p:spPr>
-      </p:cxnSp>
-      <p:cxnSp>
-        <p:nvCxnSpPr>
-          <p:cNvPr id="43" name="Connector 42"/>
-          <p:cNvCxnSpPr/>
-          <p:nvPr/>
-        </p:nvCxnSpPr>
-        <p:spPr>
-          <a:xfrm>
-            <a:off x="3977640" y="3584448"/>
-            <a:ext cx="690372" cy="0"/>
-          </a:xfrm>
-          <a:prstGeom prst="line">
-            <a:avLst/>
-          </a:prstGeom>
-          <a:ln w="11430">
-            <a:solidFill>
-              <a:srgbClr val="E4E4E4"/>
-            </a:solidFill>
-          </a:ln>
-          <a:effectLst/>
-        </p:spPr>
-      </p:cxnSp>
-      <p:cxnSp>
-        <p:nvCxnSpPr>
-          <p:cNvPr id="44" name="Connector 43"/>
-          <p:cNvCxnSpPr/>
-          <p:nvPr/>
-        </p:nvCxnSpPr>
-        <p:spPr>
-          <a:xfrm>
-            <a:off x="3977640" y="3438144"/>
-            <a:ext cx="690372" cy="0"/>
-          </a:xfrm>
-          <a:prstGeom prst="line">
-            <a:avLst/>
-          </a:prstGeom>
-          <a:ln w="11430">
-            <a:solidFill>
-              <a:srgbClr val="E4E4E4"/>
-            </a:solidFill>
-          </a:ln>
-          <a:effectLst/>
-        </p:spPr>
-      </p:cxnSp>
-      <p:cxnSp>
-        <p:nvCxnSpPr>
-          <p:cNvPr id="45" name="Connector 44"/>
-          <p:cNvCxnSpPr/>
-          <p:nvPr/>
-        </p:nvCxnSpPr>
-        <p:spPr>
-          <a:xfrm>
-            <a:off x="3977640" y="3291840"/>
-            <a:ext cx="690372" cy="0"/>
-          </a:xfrm>
-          <a:prstGeom prst="line">
-            <a:avLst/>
-          </a:prstGeom>
-          <a:ln w="11430">
-            <a:solidFill>
-              <a:srgbClr val="E4E4E4"/>
-            </a:solidFill>
-          </a:ln>
-          <a:effectLst/>
-        </p:spPr>
-      </p:cxnSp>
-      <p:cxnSp>
-        <p:nvCxnSpPr>
-          <p:cNvPr id="46" name="Connector 45"/>
-          <p:cNvCxnSpPr/>
-          <p:nvPr/>
-        </p:nvCxnSpPr>
-        <p:spPr>
-          <a:xfrm>
-            <a:off x="3977640" y="3749039"/>
-            <a:ext cx="690372" cy="0"/>
-          </a:xfrm>
-          <a:prstGeom prst="line">
-            <a:avLst/>
-          </a:prstGeom>
-          <a:ln w="17780">
-            <a:solidFill>
-              <a:srgbClr val="555555"/>
-            </a:solidFill>
-          </a:ln>
-          <a:effectLst/>
-        </p:spPr>
-      </p:cxnSp>
-      <p:sp>
-        <p:nvSpPr>
-          <p:cNvPr id="47" name="Rectangle 46"/>
-          <p:cNvSpPr/>
-          <p:nvPr/>
-        </p:nvSpPr>
-        <p:spPr>
-          <a:xfrm>
-            <a:off x="4023360" y="3145535"/>
-            <a:ext cx="118872" cy="603504"/>
-          </a:xfrm>
-          <a:prstGeom prst="rect">
-            <a:avLst/>
-          </a:prstGeom>
-          <a:solidFill>
-            <a:srgbClr val="4C72B0"/>
-          </a:solidFill>
-          <a:ln w="12700">
-            <a:solidFill>
-              <a:srgbClr val="666666"/>
-            </a:solidFill>
-          </a:ln>
-          <a:effectLst/>
-        </p:spPr>
-        <p:txBody>
-          <a:bodyPr rtlCol="0" anchor="ctr"/>
-          <a:lstStyle/>
-          <a:p>
-            <a:pPr algn="ctr"/>
-          </a:p>
-        </p:txBody>
-      </p:sp>
-      <p:sp>
-        <p:nvSpPr>
-          <p:cNvPr id="48" name="Rectangle 47"/>
-          <p:cNvSpPr/>
-          <p:nvPr/>
-        </p:nvSpPr>
-        <p:spPr>
-          <a:xfrm>
-            <a:off x="4183380" y="3346703"/>
-            <a:ext cx="118872" cy="402336"/>
-          </a:xfrm>
-          <a:prstGeom prst="rect">
-            <a:avLst/>
-          </a:prstGeom>
-          <a:solidFill>
-            <a:srgbClr val="5F9EA0"/>
-          </a:solidFill>
-          <a:ln w="12700">
-            <a:solidFill>
-              <a:srgbClr val="666666"/>
-            </a:solidFill>
-          </a:ln>
-          <a:effectLst/>
-        </p:spPr>
-        <p:txBody>
-          <a:bodyPr rtlCol="0" anchor="ctr"/>
-          <a:lstStyle/>
-          <a:p>
-            <a:pPr algn="ctr"/>
-          </a:p>
-        </p:txBody>
-      </p:sp>
-      <p:sp>
-        <p:nvSpPr>
-          <p:cNvPr id="49" name="Rectangle 48"/>
-          <p:cNvSpPr/>
-          <p:nvPr/>
-        </p:nvSpPr>
-        <p:spPr>
-          <a:xfrm>
-            <a:off x="4343400" y="3493007"/>
-            <a:ext cx="118872" cy="256032"/>
-          </a:xfrm>
-          <a:prstGeom prst="rect">
-            <a:avLst/>
-          </a:prstGeom>
-          <a:solidFill>
-            <a:srgbClr val="7BA7D7"/>
-          </a:solidFill>
-          <a:ln w="12700">
-            <a:solidFill>
-              <a:srgbClr val="666666"/>
-            </a:solidFill>
-          </a:ln>
-          <a:effectLst/>
-        </p:spPr>
-        <p:txBody>
-          <a:bodyPr rtlCol="0" anchor="ctr"/>
-          <a:lstStyle/>
-          <a:p>
-            <a:pPr algn="ctr"/>
-          </a:p>
-        </p:txBody>
-      </p:sp>
-      <p:sp>
-        <p:nvSpPr>
-          <p:cNvPr id="50" name="Rectangle 49"/>
-          <p:cNvSpPr/>
-          <p:nvPr/>
-        </p:nvSpPr>
-        <p:spPr>
-          <a:xfrm>
-            <a:off x="4503420" y="3657599"/>
-            <a:ext cx="118872" cy="91440"/>
-          </a:xfrm>
-          <a:prstGeom prst="rect">
-            <a:avLst/>
-          </a:prstGeom>
-          <a:solidFill>
-            <a:srgbClr val="C9C9C9"/>
-          </a:solidFill>
-          <a:ln w="12700">
-            <a:solidFill>
-              <a:srgbClr val="666666"/>
-            </a:solidFill>
-          </a:ln>
-          <a:effectLst/>
-        </p:spPr>
-        <p:txBody>
-          <a:bodyPr rtlCol="0" anchor="ctr"/>
-          <a:lstStyle/>
-          <a:p>
-            <a:pPr algn="ctr"/>
-          </a:p>
-        </p:txBody>
-      </p:sp>
-      <p:sp>
-        <p:nvSpPr>
-          <p:cNvPr id="51" name="TextBox 50"/>
-          <p:cNvSpPr txBox="1"/>
-          <p:nvPr/>
-        </p:nvSpPr>
-        <p:spPr>
-          <a:xfrm>
-            <a:off x="3794760" y="3886200"/>
-            <a:ext cx="1737360" cy="274320"/>
-          </a:xfrm>
-          <a:prstGeom prst="rect">
-            <a:avLst/>
-          </a:prstGeom>
-          <a:noFill/>
-        </p:spPr>
-        <p:txBody>
-          <a:bodyPr wrap="square" lIns="0" rIns="0" tIns="0" bIns="0">
-            <a:spAutoFit/>
-          </a:bodyPr>
-          <a:lstStyle/>
-          <a:p>
-            <a:pPr algn="ctr"/>
-            <a:r>
-              <a:rPr sz="1100" b="1" i="1">
-                <a:solidFill>
-                  <a:srgbClr val="1F1F1E"/>
-                </a:solidFill>
-                <a:latin typeface="Times New Roman"/>
-              </a:rPr>
-              <a:t>Task Demand w</a:t>
-            </a:r>
-          </a:p>
-        </p:txBody>
-      </p:sp>
-      <p:sp>
-        <p:nvSpPr>
-          <p:cNvPr id="52" name="TextBox 51"/>
-          <p:cNvSpPr txBox="1"/>
-          <p:nvPr/>
-        </p:nvSpPr>
-        <p:spPr>
-          <a:xfrm>
-            <a:off x="457200" y="4297680"/>
-            <a:ext cx="5303520" cy="329184"/>
-          </a:xfrm>
-          <a:prstGeom prst="rect">
-            <a:avLst/>
-          </a:prstGeom>
-          <a:noFill/>
-        </p:spPr>
-        <p:txBody>
-          <a:bodyPr wrap="square" lIns="0" rIns="0" tIns="0" bIns="0">
-            <a:spAutoFit/>
-          </a:bodyPr>
-          <a:lstStyle/>
-          <a:p>
-            <a:pPr algn="ctr"/>
-            <a:r>
-              <a:rPr sz="1400" b="0" i="0">
-                <a:solidFill>
-                  <a:srgbClr val="1F1F1E"/>
-                </a:solidFill>
-                <a:latin typeface="Times New Roman"/>
-              </a:rPr>
-              <a:t>per-skill token quota  =  w · b</a:t>
-            </a:r>
-          </a:p>
-        </p:txBody>
-      </p:sp>
-      <p:sp>
-        <p:nvSpPr>
-          <p:cNvPr id="53" name="TextBox 52"/>
-          <p:cNvSpPr txBox="1"/>
-          <p:nvPr/>
-        </p:nvSpPr>
-        <p:spPr>
-          <a:xfrm>
-            <a:off x="320040" y="4754880"/>
-            <a:ext cx="5394960" cy="274320"/>
-          </a:xfrm>
-          <a:prstGeom prst="rect">
-            <a:avLst/>
-          </a:prstGeom>
-          <a:noFill/>
-        </p:spPr>
-        <p:txBody>
-          <a:bodyPr wrap="square" lIns="0" rIns="0" tIns="0" bIns="0">
-            <a:spAutoFit/>
-          </a:bodyPr>
-          <a:lstStyle/>
-          <a:p>
-            <a:pPr algn="l"/>
-            <a:r>
-              <a:rPr sz="1200" b="1" i="1">
-                <a:solidFill>
-                  <a:srgbClr val="1F1F1E"/>
-                </a:solidFill>
-                <a:latin typeface="Times New Roman"/>
-              </a:rPr>
-              <a:t>Cross-modal bridge (fit on paid pairs)</a:t>
-            </a:r>
-          </a:p>
-        </p:txBody>
-      </p:sp>
-      <p:cxnSp>
-        <p:nvCxnSpPr>
-          <p:cNvPr id="54" name="Connector 53"/>
-          <p:cNvCxnSpPr/>
-          <p:nvPr/>
-        </p:nvCxnSpPr>
-        <p:spPr>
-          <a:xfrm>
-            <a:off x="640080" y="5897880"/>
-            <a:ext cx="530352" cy="0"/>
-          </a:xfrm>
-          <a:prstGeom prst="line">
-            <a:avLst/>
-          </a:prstGeom>
-          <a:ln w="17780">
-            <a:solidFill>
-              <a:srgbClr val="555555"/>
-            </a:solidFill>
-          </a:ln>
-          <a:effectLst/>
-        </p:spPr>
-      </p:cxnSp>
-      <p:sp>
-        <p:nvSpPr>
-          <p:cNvPr id="55" name="Rectangle 54"/>
-          <p:cNvSpPr/>
-          <p:nvPr/>
-        </p:nvSpPr>
-        <p:spPr>
-          <a:xfrm>
-            <a:off x="685800" y="5623560"/>
-            <a:ext cx="118872" cy="274320"/>
-          </a:xfrm>
-          <a:prstGeom prst="rect">
-            <a:avLst/>
-          </a:prstGeom>
-          <a:solidFill>
-            <a:srgbClr val="C9C9C9"/>
-          </a:solidFill>
-          <a:ln w="12700">
-            <a:solidFill>
-              <a:srgbClr val="666666"/>
-            </a:solidFill>
-          </a:ln>
-          <a:effectLst/>
-        </p:spPr>
-        <p:txBody>
-          <a:bodyPr rtlCol="0" anchor="ctr"/>
-          <a:lstStyle/>
-          <a:p>
-            <a:pPr algn="ctr"/>
-          </a:p>
-        </p:txBody>
-      </p:sp>
-      <p:sp>
-        <p:nvSpPr>
-          <p:cNvPr id="56" name="Rectangle 55"/>
-          <p:cNvSpPr/>
-          <p:nvPr/>
-        </p:nvSpPr>
-        <p:spPr>
-          <a:xfrm>
-            <a:off x="845820" y="5458968"/>
-            <a:ext cx="118872" cy="438912"/>
-          </a:xfrm>
-          <a:prstGeom prst="rect">
-            <a:avLst/>
-          </a:prstGeom>
-          <a:solidFill>
-            <a:srgbClr val="C9C9C9"/>
-          </a:solidFill>
-          <a:ln w="12700">
-            <a:solidFill>
-              <a:srgbClr val="666666"/>
-            </a:solidFill>
-          </a:ln>
-          <a:effectLst/>
-        </p:spPr>
-        <p:txBody>
-          <a:bodyPr rtlCol="0" anchor="ctr"/>
-          <a:lstStyle/>
-          <a:p>
-            <a:pPr algn="ctr"/>
-          </a:p>
-        </p:txBody>
-      </p:sp>
-      <p:sp>
-        <p:nvSpPr>
-          <p:cNvPr id="57" name="Rectangle 56"/>
-          <p:cNvSpPr/>
-          <p:nvPr/>
-        </p:nvSpPr>
-        <p:spPr>
-          <a:xfrm>
-            <a:off x="1005840" y="5696712"/>
-            <a:ext cx="118872" cy="201168"/>
-          </a:xfrm>
-          <a:prstGeom prst="rect">
-            <a:avLst/>
-          </a:prstGeom>
-          <a:solidFill>
-            <a:srgbClr val="C9C9C9"/>
-          </a:solidFill>
-          <a:ln w="12700">
-            <a:solidFill>
-              <a:srgbClr val="666666"/>
-            </a:solidFill>
-          </a:ln>
-          <a:effectLst/>
-        </p:spPr>
-        <p:txBody>
-          <a:bodyPr rtlCol="0" anchor="ctr"/>
-          <a:lstStyle/>
-          <a:p>
-            <a:pPr algn="ctr"/>
-          </a:p>
-        </p:txBody>
-      </p:sp>
-      <p:sp>
-        <p:nvSpPr>
-          <p:cNvPr id="58" name="TextBox 57"/>
-          <p:cNvSpPr txBox="1"/>
-          <p:nvPr/>
-        </p:nvSpPr>
-        <p:spPr>
-          <a:xfrm>
-            <a:off x="438912" y="6016752"/>
-            <a:ext cx="1280160" cy="274320"/>
-          </a:xfrm>
-          <a:prstGeom prst="rect">
-            <a:avLst/>
-          </a:prstGeom>
-          <a:noFill/>
-        </p:spPr>
-        <p:txBody>
-          <a:bodyPr wrap="square" lIns="0" rIns="0" tIns="0" bIns="0">
-            <a:spAutoFit/>
-          </a:bodyPr>
-          <a:lstStyle/>
-          <a:p>
-            <a:pPr algn="ctr"/>
-            <a:r>
-              <a:rPr sz="1000" b="1" i="1">
-                <a:solidFill>
-                  <a:srgbClr val="1F1F1E"/>
-                </a:solidFill>
-                <a:latin typeface="Times New Roman"/>
-              </a:rPr>
-              <a:t>Prompt g</a:t>
-            </a:r>
-          </a:p>
-        </p:txBody>
-      </p:sp>
-      <p:cxnSp>
-        <p:nvCxnSpPr>
-          <p:cNvPr id="59" name="Connector 58"/>
-          <p:cNvCxnSpPr/>
-          <p:nvPr/>
-        </p:nvCxnSpPr>
-        <p:spPr>
-          <a:xfrm>
-            <a:off x="1417320" y="5669280"/>
-            <a:ext cx="685800" cy="0"/>
-          </a:xfrm>
-          <a:prstGeom prst="line">
-            <a:avLst/>
-          </a:prstGeom>
-          <a:ln w="30480">
-            <a:solidFill>
-              <a:srgbClr val="333333"/>
-            </a:solidFill>
-            <a:tailEnd type="triangle" w="med" len="med"/>
-          </a:ln>
-          <a:effectLst/>
-        </p:spPr>
-      </p:cxnSp>
-      <p:sp>
-        <p:nvSpPr>
-          <p:cNvPr id="60" name="Rounded Rectangle 59"/>
-          <p:cNvSpPr/>
-          <p:nvPr/>
-        </p:nvSpPr>
-        <p:spPr>
-          <a:xfrm>
-            <a:off x="2194560" y="5349240"/>
-            <a:ext cx="658368" cy="658368"/>
-          </a:xfrm>
-          <a:prstGeom prst="roundRect">
-            <a:avLst>
-              <a:gd name="adj" fmla="val 12000"/>
-            </a:avLst>
-          </a:prstGeom>
-          <a:solidFill>
-            <a:srgbClr val="FFFFFF"/>
-          </a:solidFill>
-          <a:ln w="17780">
-            <a:solidFill>
-              <a:srgbClr val="555555"/>
-            </a:solidFill>
-          </a:ln>
-          <a:effectLst/>
-        </p:spPr>
-        <p:txBody>
-          <a:bodyPr rtlCol="0" anchor="ctr"/>
-          <a:lstStyle/>
-          <a:p>
-            <a:pPr algn="ctr"/>
-          </a:p>
-        </p:txBody>
-      </p:sp>
-      <p:sp>
-        <p:nvSpPr>
-          <p:cNvPr id="61" name="Rectangle 60"/>
-          <p:cNvSpPr/>
-          <p:nvPr/>
-        </p:nvSpPr>
-        <p:spPr>
-          <a:xfrm>
-            <a:off x="2258568" y="5413248"/>
-            <a:ext cx="146304" cy="146304"/>
-          </a:xfrm>
-          <a:prstGeom prst="rect">
-            <a:avLst/>
-          </a:prstGeom>
-          <a:solidFill>
-            <a:srgbClr val="4C72B0"/>
-          </a:solidFill>
-          <a:ln w="7620">
-            <a:solidFill>
-              <a:srgbClr val="FFFFFF"/>
-            </a:solidFill>
-          </a:ln>
-          <a:effectLst/>
-        </p:spPr>
-        <p:txBody>
-          <a:bodyPr rtlCol="0" anchor="ctr"/>
-          <a:lstStyle/>
-          <a:p>
-            <a:pPr algn="ctr"/>
-          </a:p>
-        </p:txBody>
-      </p:sp>
-      <p:sp>
-        <p:nvSpPr>
-          <p:cNvPr id="62" name="Rectangle 61"/>
-          <p:cNvSpPr/>
-          <p:nvPr/>
-        </p:nvSpPr>
-        <p:spPr>
-          <a:xfrm>
-            <a:off x="2441448" y="5413248"/>
-            <a:ext cx="146304" cy="146304"/>
-          </a:xfrm>
-          <a:prstGeom prst="rect">
-            <a:avLst/>
-          </a:prstGeom>
-          <a:solidFill>
-            <a:srgbClr val="9EC99A"/>
-          </a:solidFill>
-          <a:ln w="7620">
-            <a:solidFill>
-              <a:srgbClr val="FFFFFF"/>
-            </a:solidFill>
-          </a:ln>
-          <a:effectLst/>
-        </p:spPr>
-        <p:txBody>
-          <a:bodyPr rtlCol="0" anchor="ctr"/>
-          <a:lstStyle/>
-          <a:p>
-            <a:pPr algn="ctr"/>
-          </a:p>
-        </p:txBody>
-      </p:sp>
-      <p:sp>
-        <p:nvSpPr>
-          <p:cNvPr id="63" name="Rectangle 62"/>
-          <p:cNvSpPr/>
-          <p:nvPr/>
-        </p:nvSpPr>
-        <p:spPr>
-          <a:xfrm>
-            <a:off x="2624327" y="5413248"/>
-            <a:ext cx="146304" cy="146304"/>
-          </a:xfrm>
-          <a:prstGeom prst="rect">
-            <a:avLst/>
-          </a:prstGeom>
-          <a:solidFill>
-            <a:srgbClr val="F2B98F"/>
-          </a:solidFill>
-          <a:ln w="7620">
-            <a:solidFill>
-              <a:srgbClr val="FFFFFF"/>
-            </a:solidFill>
-          </a:ln>
-          <a:effectLst/>
-        </p:spPr>
-        <p:txBody>
-          <a:bodyPr rtlCol="0" anchor="ctr"/>
-          <a:lstStyle/>
-          <a:p>
-            <a:pPr algn="ctr"/>
-          </a:p>
-        </p:txBody>
-      </p:sp>
-      <p:sp>
-        <p:nvSpPr>
-          <p:cNvPr id="64" name="Rectangle 63"/>
-          <p:cNvSpPr/>
-          <p:nvPr/>
-        </p:nvSpPr>
-        <p:spPr>
-          <a:xfrm>
-            <a:off x="2258568" y="5596128"/>
-            <a:ext cx="146304" cy="146304"/>
-          </a:xfrm>
-          <a:prstGeom prst="rect">
-            <a:avLst/>
-          </a:prstGeom>
-          <a:solidFill>
-            <a:srgbClr val="9EC99A"/>
-          </a:solidFill>
-          <a:ln w="7620">
-            <a:solidFill>
-              <a:srgbClr val="FFFFFF"/>
-            </a:solidFill>
-          </a:ln>
-          <a:effectLst/>
-        </p:spPr>
-        <p:txBody>
-          <a:bodyPr rtlCol="0" anchor="ctr"/>
-          <a:lstStyle/>
-          <a:p>
-            <a:pPr algn="ctr"/>
-          </a:p>
-        </p:txBody>
-      </p:sp>
-      <p:sp>
-        <p:nvSpPr>
-          <p:cNvPr id="65" name="Rectangle 64"/>
-          <p:cNvSpPr/>
-          <p:nvPr/>
-        </p:nvSpPr>
-        <p:spPr>
-          <a:xfrm>
-            <a:off x="2441448" y="5596128"/>
-            <a:ext cx="146304" cy="146304"/>
-          </a:xfrm>
-          <a:prstGeom prst="rect">
-            <a:avLst/>
-          </a:prstGeom>
-          <a:solidFill>
-            <a:srgbClr val="F2B98F"/>
-          </a:solidFill>
-          <a:ln w="7620">
-            <a:solidFill>
-              <a:srgbClr val="FFFFFF"/>
-            </a:solidFill>
-          </a:ln>
-          <a:effectLst/>
-        </p:spPr>
-        <p:txBody>
-          <a:bodyPr rtlCol="0" anchor="ctr"/>
-          <a:lstStyle/>
-          <a:p>
-            <a:pPr algn="ctr"/>
-          </a:p>
-        </p:txBody>
-      </p:sp>
-      <p:sp>
-        <p:nvSpPr>
-          <p:cNvPr id="66" name="Rectangle 65"/>
-          <p:cNvSpPr/>
-          <p:nvPr/>
-        </p:nvSpPr>
-        <p:spPr>
-          <a:xfrm>
-            <a:off x="2624327" y="5596128"/>
-            <a:ext cx="146304" cy="146304"/>
-          </a:xfrm>
-          <a:prstGeom prst="rect">
-            <a:avLst/>
-          </a:prstGeom>
-          <a:solidFill>
-            <a:srgbClr val="4C72B0"/>
-          </a:solidFill>
-          <a:ln w="7620">
-            <a:solidFill>
-              <a:srgbClr val="FFFFFF"/>
-            </a:solidFill>
-          </a:ln>
-          <a:effectLst/>
-        </p:spPr>
-        <p:txBody>
-          <a:bodyPr rtlCol="0" anchor="ctr"/>
-          <a:lstStyle/>
-          <a:p>
-            <a:pPr algn="ctr"/>
-          </a:p>
-        </p:txBody>
-      </p:sp>
-      <p:sp>
-        <p:nvSpPr>
-          <p:cNvPr id="67" name="Rectangle 66"/>
-          <p:cNvSpPr/>
-          <p:nvPr/>
-        </p:nvSpPr>
-        <p:spPr>
-          <a:xfrm>
-            <a:off x="2258568" y="5779008"/>
-            <a:ext cx="146304" cy="146304"/>
-          </a:xfrm>
-          <a:prstGeom prst="rect">
-            <a:avLst/>
-          </a:prstGeom>
-          <a:solidFill>
-            <a:srgbClr val="F2B98F"/>
-          </a:solidFill>
-          <a:ln w="7620">
-            <a:solidFill>
-              <a:srgbClr val="FFFFFF"/>
-            </a:solidFill>
-          </a:ln>
-          <a:effectLst/>
-        </p:spPr>
-        <p:txBody>
-          <a:bodyPr rtlCol="0" anchor="ctr"/>
-          <a:lstStyle/>
-          <a:p>
-            <a:pPr algn="ctr"/>
-          </a:p>
-        </p:txBody>
-      </p:sp>
-      <p:sp>
-        <p:nvSpPr>
-          <p:cNvPr id="68" name="Rectangle 67"/>
-          <p:cNvSpPr/>
-          <p:nvPr/>
-        </p:nvSpPr>
-        <p:spPr>
-          <a:xfrm>
-            <a:off x="2441448" y="5779008"/>
-            <a:ext cx="146304" cy="146304"/>
-          </a:xfrm>
-          <a:prstGeom prst="rect">
-            <a:avLst/>
-          </a:prstGeom>
-          <a:solidFill>
-            <a:srgbClr val="4C72B0"/>
-          </a:solidFill>
-          <a:ln w="7620">
-            <a:solidFill>
-              <a:srgbClr val="FFFFFF"/>
-            </a:solidFill>
-          </a:ln>
-          <a:effectLst/>
-        </p:spPr>
-        <p:txBody>
-          <a:bodyPr rtlCol="0" anchor="ctr"/>
-          <a:lstStyle/>
-          <a:p>
-            <a:pPr algn="ctr"/>
-          </a:p>
-        </p:txBody>
-      </p:sp>
-      <p:sp>
-        <p:nvSpPr>
-          <p:cNvPr id="69" name="Rectangle 68"/>
-          <p:cNvSpPr/>
-          <p:nvPr/>
-        </p:nvSpPr>
-        <p:spPr>
-          <a:xfrm>
-            <a:off x="2624327" y="5779008"/>
-            <a:ext cx="146304" cy="146304"/>
-          </a:xfrm>
-          <a:prstGeom prst="rect">
-            <a:avLst/>
-          </a:prstGeom>
-          <a:solidFill>
-            <a:srgbClr val="9EC99A"/>
-          </a:solidFill>
-          <a:ln w="7620">
-            <a:solidFill>
-              <a:srgbClr val="FFFFFF"/>
-            </a:solidFill>
-          </a:ln>
-          <a:effectLst/>
-        </p:spPr>
-        <p:txBody>
-          <a:bodyPr rtlCol="0" anchor="ctr"/>
-          <a:lstStyle/>
-          <a:p>
-            <a:pPr algn="ctr"/>
-          </a:p>
-        </p:txBody>
-      </p:sp>
-      <p:sp>
-        <p:nvSpPr>
-          <p:cNvPr id="70" name="TextBox 69"/>
-          <p:cNvSpPr txBox="1"/>
-          <p:nvPr/>
-        </p:nvSpPr>
-        <p:spPr>
-          <a:xfrm>
-            <a:off x="1965960" y="6108192"/>
-            <a:ext cx="1188720" cy="274320"/>
-          </a:xfrm>
-          <a:prstGeom prst="rect">
-            <a:avLst/>
-          </a:prstGeom>
-          <a:noFill/>
-        </p:spPr>
-        <p:txBody>
-          <a:bodyPr wrap="square" lIns="0" rIns="0" tIns="0" bIns="0">
-            <a:spAutoFit/>
-          </a:bodyPr>
-          <a:lstStyle/>
-          <a:p>
-            <a:pPr algn="ctr"/>
-            <a:r>
-              <a:rPr sz="1000" b="1" i="1">
-                <a:solidFill>
-                  <a:srgbClr val="1F1F1E"/>
-                </a:solidFill>
-                <a:latin typeface="Times New Roman"/>
-              </a:rPr>
-              <a:t>Ridge Map</a:t>
-            </a:r>
-          </a:p>
-        </p:txBody>
-      </p:sp>
-      <p:cxnSp>
-        <p:nvCxnSpPr>
-          <p:cNvPr id="71" name="Connector 70"/>
-          <p:cNvCxnSpPr/>
-          <p:nvPr/>
-        </p:nvCxnSpPr>
-        <p:spPr>
-          <a:xfrm>
-            <a:off x="2971800" y="5669280"/>
-            <a:ext cx="685800" cy="0"/>
-          </a:xfrm>
-          <a:prstGeom prst="line">
-            <a:avLst/>
-          </a:prstGeom>
-          <a:ln w="30480">
-            <a:solidFill>
-              <a:srgbClr val="333333"/>
-            </a:solidFill>
-            <a:tailEnd type="triangle" w="med" len="med"/>
-          </a:ln>
-          <a:effectLst/>
-        </p:spPr>
-      </p:cxnSp>
-      <p:cxnSp>
-        <p:nvCxnSpPr>
-          <p:cNvPr id="72" name="Connector 71"/>
-          <p:cNvCxnSpPr/>
-          <p:nvPr/>
-        </p:nvCxnSpPr>
-        <p:spPr>
-          <a:xfrm>
-            <a:off x="3794760" y="5897880"/>
-            <a:ext cx="530352" cy="0"/>
-          </a:xfrm>
-          <a:prstGeom prst="line">
-            <a:avLst/>
-          </a:prstGeom>
-          <a:ln w="17780">
-            <a:solidFill>
-              <a:srgbClr val="555555"/>
-            </a:solidFill>
-          </a:ln>
-          <a:effectLst/>
-        </p:spPr>
-      </p:cxnSp>
-      <p:sp>
-        <p:nvSpPr>
-          <p:cNvPr id="73" name="Rectangle 72"/>
-          <p:cNvSpPr/>
-          <p:nvPr/>
-        </p:nvSpPr>
-        <p:spPr>
-          <a:xfrm>
-            <a:off x="3840480" y="5394960"/>
-            <a:ext cx="118872" cy="502920"/>
-          </a:xfrm>
-          <a:prstGeom prst="rect">
-            <a:avLst/>
-          </a:prstGeom>
-          <a:solidFill>
-            <a:srgbClr val="9EC99A"/>
-          </a:solidFill>
-          <a:ln w="12700">
-            <a:solidFill>
-              <a:srgbClr val="666666"/>
-            </a:solidFill>
-          </a:ln>
-          <a:effectLst/>
-        </p:spPr>
-        <p:txBody>
-          <a:bodyPr rtlCol="0" anchor="ctr"/>
-          <a:lstStyle/>
-          <a:p>
-            <a:pPr algn="ctr"/>
-          </a:p>
-        </p:txBody>
-      </p:sp>
-      <p:sp>
-        <p:nvSpPr>
-          <p:cNvPr id="74" name="Rectangle 73"/>
-          <p:cNvSpPr/>
-          <p:nvPr/>
-        </p:nvSpPr>
-        <p:spPr>
-          <a:xfrm>
-            <a:off x="4000500" y="5669280"/>
-            <a:ext cx="118872" cy="228600"/>
-          </a:xfrm>
-          <a:prstGeom prst="rect">
-            <a:avLst/>
-          </a:prstGeom>
-          <a:solidFill>
-            <a:srgbClr val="9EC99A"/>
-          </a:solidFill>
-          <a:ln w="12700">
-            <a:solidFill>
-              <a:srgbClr val="666666"/>
-            </a:solidFill>
-          </a:ln>
-          <a:effectLst/>
-        </p:spPr>
-        <p:txBody>
-          <a:bodyPr rtlCol="0" anchor="ctr"/>
-          <a:lstStyle/>
-          <a:p>
-            <a:pPr algn="ctr"/>
-          </a:p>
-        </p:txBody>
-      </p:sp>
-      <p:sp>
-        <p:nvSpPr>
-          <p:cNvPr id="75" name="Rectangle 74"/>
-          <p:cNvSpPr/>
-          <p:nvPr/>
-        </p:nvSpPr>
-        <p:spPr>
-          <a:xfrm>
-            <a:off x="4160520" y="5513832"/>
-            <a:ext cx="118872" cy="384048"/>
-          </a:xfrm>
-          <a:prstGeom prst="rect">
-            <a:avLst/>
-          </a:prstGeom>
-          <a:solidFill>
-            <a:srgbClr val="9EC99A"/>
-          </a:solidFill>
-          <a:ln w="12700">
-            <a:solidFill>
-              <a:srgbClr val="666666"/>
-            </a:solidFill>
-          </a:ln>
-          <a:effectLst/>
-        </p:spPr>
-        <p:txBody>
-          <a:bodyPr rtlCol="0" anchor="ctr"/>
-          <a:lstStyle/>
-          <a:p>
-            <a:pPr algn="ctr"/>
-          </a:p>
-        </p:txBody>
-      </p:sp>
-      <p:sp>
-        <p:nvSpPr>
-          <p:cNvPr id="76" name="TextBox 75"/>
-          <p:cNvSpPr txBox="1"/>
-          <p:nvPr/>
-        </p:nvSpPr>
-        <p:spPr>
-          <a:xfrm>
-            <a:off x="3611880" y="6016752"/>
-            <a:ext cx="1463040" cy="274320"/>
-          </a:xfrm>
-          <a:prstGeom prst="rect">
-            <a:avLst/>
-          </a:prstGeom>
-          <a:noFill/>
-        </p:spPr>
-        <p:txBody>
-          <a:bodyPr wrap="square" lIns="0" rIns="0" tIns="0" bIns="0">
-            <a:spAutoFit/>
-          </a:bodyPr>
-          <a:lstStyle/>
-          <a:p>
-            <a:pPr algn="ctr"/>
-            <a:r>
-              <a:rPr sz="1000" b="1" i="1">
-                <a:solidFill>
-                  <a:srgbClr val="1F1F1E"/>
-                </a:solidFill>
-                <a:latin typeface="Times New Roman"/>
-              </a:rPr>
-              <a:t>Predicted Skills</a:t>
-            </a:r>
-          </a:p>
-        </p:txBody>
-      </p:sp>
-      <p:sp>
-        <p:nvSpPr>
-          <p:cNvPr id="77" name="TextBox 76"/>
-          <p:cNvSpPr txBox="1"/>
-          <p:nvPr/>
-        </p:nvSpPr>
-        <p:spPr>
-          <a:xfrm>
-            <a:off x="6217920" y="219456"/>
-            <a:ext cx="5669280" cy="274320"/>
-          </a:xfrm>
-          <a:prstGeom prst="rect">
-            <a:avLst/>
-          </a:prstGeom>
-          <a:noFill/>
-        </p:spPr>
-        <p:txBody>
-          <a:bodyPr wrap="square" lIns="0" rIns="0" tIns="0" bIns="0">
-            <a:spAutoFit/>
-          </a:bodyPr>
-          <a:lstStyle/>
-          <a:p>
-            <a:pPr algn="l"/>
-            <a:r>
-              <a:rPr sz="1400" b="1" i="1">
-                <a:solidFill>
-                  <a:srgbClr val="1F1F1E"/>
-                </a:solidFill>
-                <a:latin typeface="Times New Roman"/>
-              </a:rPr>
-              <a:t>Spending the budget where demand is unmet</a:t>
-            </a:r>
-          </a:p>
-        </p:txBody>
-      </p:sp>
-      <p:sp>
-        <p:nvSpPr>
-          <p:cNvPr id="78" name="Rounded Rectangle 77"/>
-          <p:cNvSpPr/>
-          <p:nvPr/>
-        </p:nvSpPr>
-        <p:spPr>
-          <a:xfrm>
-            <a:off x="6423659" y="800100"/>
-            <a:ext cx="960120" cy="868680"/>
-          </a:xfrm>
-          <a:prstGeom prst="roundRect">
-            <a:avLst>
-              <a:gd name="adj" fmla="val 25000"/>
-            </a:avLst>
-          </a:prstGeom>
-          <a:solidFill>
-            <a:srgbClr val="EEF2F9"/>
-          </a:solidFill>
-          <a:ln w="20320">
-            <a:solidFill>
-              <a:srgbClr val="8A5AA8"/>
-            </a:solidFill>
-          </a:ln>
-          <a:effectLst/>
-        </p:spPr>
-        <p:txBody>
-          <a:bodyPr rtlCol="0" anchor="ctr"/>
-          <a:lstStyle/>
-          <a:p>
-            <a:pPr algn="ctr"/>
-          </a:p>
-        </p:txBody>
-      </p:sp>
-      <p:sp>
-        <p:nvSpPr>
-          <p:cNvPr id="79" name="Rectangle 78"/>
-          <p:cNvSpPr/>
-          <p:nvPr/>
-        </p:nvSpPr>
-        <p:spPr>
-          <a:xfrm>
-            <a:off x="6892747" y="672084"/>
-            <a:ext cx="21945" cy="128016"/>
-          </a:xfrm>
-          <a:prstGeom prst="rect">
-            <a:avLst/>
-          </a:prstGeom>
-          <a:solidFill>
-            <a:srgbClr val="8A5AA8"/>
-          </a:solidFill>
-          <a:ln>
-            <a:noFill/>
-          </a:ln>
-          <a:effectLst/>
-        </p:spPr>
-        <p:txBody>
-          <a:bodyPr rtlCol="0" anchor="ctr"/>
-          <a:lstStyle/>
-          <a:p>
-            <a:pPr algn="ctr"/>
-          </a:p>
-        </p:txBody>
-      </p:sp>
-      <p:sp>
-        <p:nvSpPr>
-          <p:cNvPr id="80" name="Oval 79"/>
-          <p:cNvSpPr/>
-          <p:nvPr/>
-        </p:nvSpPr>
-        <p:spPr>
-          <a:xfrm>
-            <a:off x="6858000" y="580644"/>
-            <a:ext cx="91440" cy="91440"/>
-          </a:xfrm>
-          <a:prstGeom prst="ellipse">
-            <a:avLst/>
-          </a:prstGeom>
-          <a:solidFill>
-            <a:srgbClr val="8A5AA8"/>
-          </a:solidFill>
-          <a:ln>
-            <a:noFill/>
-          </a:ln>
-          <a:effectLst/>
-        </p:spPr>
-        <p:txBody>
-          <a:bodyPr rtlCol="0" anchor="ctr"/>
-          <a:lstStyle/>
-          <a:p>
-            <a:pPr algn="ctr"/>
-          </a:p>
-        </p:txBody>
-      </p:sp>
-      <p:sp>
-        <p:nvSpPr>
-          <p:cNvPr id="81" name="Oval 80"/>
-          <p:cNvSpPr/>
-          <p:nvPr/>
-        </p:nvSpPr>
-        <p:spPr>
-          <a:xfrm>
-            <a:off x="6689750" y="1106424"/>
-            <a:ext cx="82296" cy="82296"/>
-          </a:xfrm>
-          <a:prstGeom prst="ellipse">
-            <a:avLst/>
-          </a:prstGeom>
-          <a:solidFill>
-            <a:srgbClr val="8A5AA8"/>
-          </a:solidFill>
-          <a:ln>
-            <a:noFill/>
-          </a:ln>
-          <a:effectLst/>
-        </p:spPr>
-        <p:txBody>
-          <a:bodyPr rtlCol="0" anchor="ctr"/>
-          <a:lstStyle/>
-          <a:p>
-            <a:pPr algn="ctr"/>
-          </a:p>
-        </p:txBody>
-      </p:sp>
-      <p:sp>
-        <p:nvSpPr>
-          <p:cNvPr id="82" name="Oval 81"/>
-          <p:cNvSpPr/>
-          <p:nvPr/>
-        </p:nvSpPr>
-        <p:spPr>
-          <a:xfrm>
-            <a:off x="7035393" y="1106424"/>
-            <a:ext cx="82296" cy="82296"/>
-          </a:xfrm>
-          <a:prstGeom prst="ellipse">
-            <a:avLst/>
-          </a:prstGeom>
-          <a:solidFill>
-            <a:srgbClr val="8A5AA8"/>
-          </a:solidFill>
-          <a:ln>
-            <a:noFill/>
-          </a:ln>
-          <a:effectLst/>
-        </p:spPr>
-        <p:txBody>
-          <a:bodyPr rtlCol="0" anchor="ctr"/>
-          <a:lstStyle/>
-          <a:p>
-            <a:pPr algn="ctr"/>
-          </a:p>
-        </p:txBody>
-      </p:sp>
-      <p:sp>
-        <p:nvSpPr>
-          <p:cNvPr id="83" name="Rounded Rectangle 82"/>
-          <p:cNvSpPr/>
-          <p:nvPr/>
-        </p:nvSpPr>
-        <p:spPr>
-          <a:xfrm>
-            <a:off x="6769303" y="1338681"/>
-            <a:ext cx="268833" cy="27432"/>
-          </a:xfrm>
-          <a:prstGeom prst="roundRect">
-            <a:avLst>
-              <a:gd name="adj" fmla="val 50000"/>
-            </a:avLst>
-          </a:prstGeom>
-          <a:solidFill>
-            <a:srgbClr val="8A5AA8"/>
-          </a:solidFill>
-          <a:ln>
-            <a:noFill/>
-          </a:ln>
-          <a:effectLst/>
-        </p:spPr>
-        <p:txBody>
-          <a:bodyPr rtlCol="0" anchor="ctr"/>
-          <a:lstStyle/>
-          <a:p>
-            <a:pPr algn="ctr"/>
-          </a:p>
-        </p:txBody>
-      </p:sp>
-      <p:sp>
-        <p:nvSpPr>
-          <p:cNvPr id="84" name="TextBox 83"/>
-          <p:cNvSpPr txBox="1"/>
-          <p:nvPr/>
-        </p:nvSpPr>
-        <p:spPr>
-          <a:xfrm>
-            <a:off x="6103620" y="1705356"/>
-            <a:ext cx="1600200" cy="256032"/>
-          </a:xfrm>
-          <a:prstGeom prst="rect">
-            <a:avLst/>
-          </a:prstGeom>
-          <a:noFill/>
-        </p:spPr>
-        <p:txBody>
-          <a:bodyPr wrap="square" lIns="0" rIns="0" tIns="0" bIns="0">
-            <a:spAutoFit/>
-          </a:bodyPr>
-          <a:lstStyle/>
-          <a:p>
-            <a:pPr algn="ctr"/>
-            <a:r>
-              <a:rPr sz="950" b="1" i="0">
-                <a:solidFill>
-                  <a:srgbClr val="1F1F1E"/>
-                </a:solidFill>
-                <a:latin typeface="Times New Roman"/>
-              </a:rPr>
-              <a:t>Teacher API</a:t>
-            </a:r>
-          </a:p>
-        </p:txBody>
-      </p:sp>
-      <p:sp>
-        <p:nvSpPr>
-          <p:cNvPr id="85" name="Oval 84"/>
-          <p:cNvSpPr/>
-          <p:nvPr/>
-        </p:nvSpPr>
-        <p:spPr>
-          <a:xfrm>
-            <a:off x="7543800" y="1188720"/>
-            <a:ext cx="310896" cy="77724"/>
-          </a:xfrm>
-          <a:prstGeom prst="ellipse">
-            <a:avLst/>
-          </a:prstGeom>
-          <a:solidFill>
-            <a:srgbClr val="E8C56A"/>
-          </a:solidFill>
-          <a:ln w="12700">
-            <a:solidFill>
-              <a:srgbClr val="9A7B2E"/>
-            </a:solidFill>
-          </a:ln>
-          <a:effectLst/>
-        </p:spPr>
-        <p:txBody>
-          <a:bodyPr rtlCol="0" anchor="ctr"/>
-          <a:lstStyle/>
-          <a:p>
-            <a:pPr algn="ctr"/>
-          </a:p>
-        </p:txBody>
-      </p:sp>
-      <p:sp>
-        <p:nvSpPr>
-          <p:cNvPr id="86" name="Oval 85"/>
-          <p:cNvSpPr/>
-          <p:nvPr/>
-        </p:nvSpPr>
-        <p:spPr>
-          <a:xfrm>
-            <a:off x="7543800" y="1097280"/>
-            <a:ext cx="310896" cy="77724"/>
-          </a:xfrm>
-          <a:prstGeom prst="ellipse">
-            <a:avLst/>
-          </a:prstGeom>
-          <a:solidFill>
-            <a:srgbClr val="E8C56A"/>
-          </a:solidFill>
-          <a:ln w="12700">
-            <a:solidFill>
-              <a:srgbClr val="9A7B2E"/>
-            </a:solidFill>
-          </a:ln>
-          <a:effectLst/>
-        </p:spPr>
-        <p:txBody>
-          <a:bodyPr rtlCol="0" anchor="ctr"/>
-          <a:lstStyle/>
-          <a:p>
-            <a:pPr algn="ctr"/>
-          </a:p>
-        </p:txBody>
-      </p:sp>
-      <p:sp>
-        <p:nvSpPr>
-          <p:cNvPr id="87" name="Oval 86"/>
-          <p:cNvSpPr/>
-          <p:nvPr/>
-        </p:nvSpPr>
-        <p:spPr>
-          <a:xfrm>
-            <a:off x="7543800" y="1005840"/>
-            <a:ext cx="310896" cy="77724"/>
-          </a:xfrm>
-          <a:prstGeom prst="ellipse">
-            <a:avLst/>
-          </a:prstGeom>
-          <a:solidFill>
-            <a:srgbClr val="E8C56A"/>
-          </a:solidFill>
-          <a:ln w="12700">
-            <a:solidFill>
-              <a:srgbClr val="9A7B2E"/>
-            </a:solidFill>
-          </a:ln>
-          <a:effectLst/>
-        </p:spPr>
-        <p:txBody>
-          <a:bodyPr rtlCol="0" anchor="ctr"/>
-          <a:lstStyle/>
-          <a:p>
-            <a:pPr algn="ctr"/>
-          </a:p>
-        </p:txBody>
-      </p:sp>
-      <p:sp>
-        <p:nvSpPr>
-          <p:cNvPr id="88" name="Oval 87"/>
-          <p:cNvSpPr/>
-          <p:nvPr/>
-        </p:nvSpPr>
-        <p:spPr>
-          <a:xfrm>
-            <a:off x="7543800" y="914400"/>
-            <a:ext cx="310896" cy="77724"/>
-          </a:xfrm>
-          <a:prstGeom prst="ellipse">
-            <a:avLst/>
-          </a:prstGeom>
-          <a:solidFill>
-            <a:srgbClr val="E8C56A"/>
-          </a:solidFill>
-          <a:ln w="12700">
-            <a:solidFill>
-              <a:srgbClr val="9A7B2E"/>
-            </a:solidFill>
-          </a:ln>
-          <a:effectLst/>
-        </p:spPr>
-        <p:txBody>
-          <a:bodyPr rtlCol="0" anchor="ctr"/>
-          <a:lstStyle/>
-          <a:p>
-            <a:pPr algn="ctr"/>
-          </a:p>
-        </p:txBody>
-      </p:sp>
-      <p:sp>
-        <p:nvSpPr>
-          <p:cNvPr id="89" name="TextBox 88"/>
-          <p:cNvSpPr txBox="1"/>
-          <p:nvPr/>
-        </p:nvSpPr>
-        <p:spPr>
-          <a:xfrm>
-            <a:off x="7360920" y="1353312"/>
-            <a:ext cx="822960" cy="274320"/>
-          </a:xfrm>
-          <a:prstGeom prst="rect">
-            <a:avLst/>
-          </a:prstGeom>
-          <a:noFill/>
-        </p:spPr>
-        <p:txBody>
-          <a:bodyPr wrap="square" lIns="0" rIns="0" tIns="0" bIns="0">
-            <a:spAutoFit/>
-          </a:bodyPr>
-          <a:lstStyle/>
-          <a:p>
-            <a:pPr algn="ctr"/>
-            <a:r>
-              <a:rPr sz="1200" b="1" i="1">
-                <a:solidFill>
-                  <a:srgbClr val="1F1F1E"/>
-                </a:solidFill>
-                <a:latin typeface="Times New Roman"/>
-              </a:rPr>
-              <a:t>b</a:t>
-            </a:r>
-          </a:p>
-        </p:txBody>
-      </p:sp>
-      <p:cxnSp>
-        <p:nvCxnSpPr>
-          <p:cNvPr id="90" name="Connector 89"/>
-          <p:cNvCxnSpPr/>
-          <p:nvPr/>
-        </p:nvCxnSpPr>
-        <p:spPr>
-          <a:xfrm>
-            <a:off x="7635240" y="1234440"/>
-            <a:ext cx="502920" cy="0"/>
-          </a:xfrm>
-          <a:prstGeom prst="line">
-            <a:avLst/>
-          </a:prstGeom>
-          <a:ln w="30480">
-            <a:solidFill>
-              <a:srgbClr val="333333"/>
-            </a:solidFill>
-            <a:tailEnd type="triangle" w="med" len="med"/>
-          </a:ln>
-          <a:effectLst/>
-        </p:spPr>
-      </p:cxnSp>
-      <p:cxnSp>
-        <p:nvCxnSpPr>
-          <p:cNvPr id="91" name="Connector 90"/>
-          <p:cNvCxnSpPr/>
-          <p:nvPr/>
-        </p:nvCxnSpPr>
-        <p:spPr>
-          <a:xfrm>
-            <a:off x="8229600" y="1600200"/>
-            <a:ext cx="530352" cy="0"/>
-          </a:xfrm>
-          <a:prstGeom prst="line">
-            <a:avLst/>
-          </a:prstGeom>
-          <a:ln w="17780">
-            <a:solidFill>
-              <a:srgbClr val="555555"/>
-            </a:solidFill>
-          </a:ln>
-          <a:effectLst/>
-        </p:spPr>
-      </p:cxnSp>
-      <p:sp>
-        <p:nvSpPr>
-          <p:cNvPr id="92" name="Rectangle 91"/>
-          <p:cNvSpPr/>
-          <p:nvPr/>
-        </p:nvSpPr>
-        <p:spPr>
-          <a:xfrm>
-            <a:off x="8275320" y="1216152"/>
-            <a:ext cx="118872" cy="384048"/>
-          </a:xfrm>
-          <a:prstGeom prst="rect">
-            <a:avLst/>
-          </a:prstGeom>
-          <a:solidFill>
-            <a:srgbClr val="9EC99A"/>
-          </a:solidFill>
-          <a:ln w="12700">
-            <a:solidFill>
-              <a:srgbClr val="666666"/>
-            </a:solidFill>
-          </a:ln>
-          <a:effectLst/>
-        </p:spPr>
-        <p:txBody>
-          <a:bodyPr rtlCol="0" anchor="ctr"/>
-          <a:lstStyle/>
-          <a:p>
-            <a:pPr algn="ctr"/>
-          </a:p>
-        </p:txBody>
-      </p:sp>
-      <p:sp>
-        <p:nvSpPr>
-          <p:cNvPr id="93" name="Rectangle 92"/>
-          <p:cNvSpPr/>
-          <p:nvPr/>
-        </p:nvSpPr>
-        <p:spPr>
-          <a:xfrm>
-            <a:off x="8435340" y="1417320"/>
-            <a:ext cx="118872" cy="182880"/>
-          </a:xfrm>
-          <a:prstGeom prst="rect">
-            <a:avLst/>
-          </a:prstGeom>
-          <a:solidFill>
-            <a:srgbClr val="9EC99A"/>
-          </a:solidFill>
-          <a:ln w="12700">
-            <a:solidFill>
-              <a:srgbClr val="666666"/>
-            </a:solidFill>
-          </a:ln>
-          <a:effectLst/>
-        </p:spPr>
-        <p:txBody>
-          <a:bodyPr rtlCol="0" anchor="ctr"/>
-          <a:lstStyle/>
-          <a:p>
-            <a:pPr algn="ctr"/>
-          </a:p>
-        </p:txBody>
-      </p:sp>
-      <p:sp>
-        <p:nvSpPr>
-          <p:cNvPr id="94" name="Rectangle 93"/>
-          <p:cNvSpPr/>
-          <p:nvPr/>
-        </p:nvSpPr>
-        <p:spPr>
-          <a:xfrm>
-            <a:off x="8595360" y="1289304"/>
-            <a:ext cx="118872" cy="310896"/>
-          </a:xfrm>
-          <a:prstGeom prst="rect">
-            <a:avLst/>
-          </a:prstGeom>
-          <a:solidFill>
-            <a:srgbClr val="9EC99A"/>
-          </a:solidFill>
-          <a:ln w="12700">
-            <a:solidFill>
-              <a:srgbClr val="666666"/>
-            </a:solidFill>
-          </a:ln>
-          <a:effectLst/>
-        </p:spPr>
-        <p:txBody>
-          <a:bodyPr rtlCol="0" anchor="ctr"/>
-          <a:lstStyle/>
-          <a:p>
-            <a:pPr algn="ctr"/>
-          </a:p>
-        </p:txBody>
-      </p:sp>
-      <p:sp>
-        <p:nvSpPr>
-          <p:cNvPr id="95" name="TextBox 94"/>
-          <p:cNvSpPr txBox="1"/>
-          <p:nvPr/>
-        </p:nvSpPr>
-        <p:spPr>
-          <a:xfrm>
-            <a:off x="8046720" y="1719072"/>
-            <a:ext cx="1371600" cy="274320"/>
-          </a:xfrm>
-          <a:prstGeom prst="rect">
-            <a:avLst/>
-          </a:prstGeom>
-          <a:noFill/>
-        </p:spPr>
-        <p:txBody>
-          <a:bodyPr wrap="square" lIns="0" rIns="0" tIns="0" bIns="0">
-            <a:spAutoFit/>
-          </a:bodyPr>
-          <a:lstStyle/>
-          <a:p>
-            <a:pPr algn="ctr"/>
-            <a:r>
-              <a:rPr sz="1000" b="1" i="1">
-                <a:solidFill>
-                  <a:srgbClr val="1F1F1E"/>
-                </a:solidFill>
-                <a:latin typeface="Times New Roman"/>
-              </a:rPr>
-              <a:t>ŝ(x)  predicted</a:t>
-            </a:r>
-          </a:p>
-        </p:txBody>
-      </p:sp>
-      <p:cxnSp>
-        <p:nvCxnSpPr>
-          <p:cNvPr id="96" name="Connector 95"/>
-          <p:cNvCxnSpPr/>
-          <p:nvPr/>
-        </p:nvCxnSpPr>
-        <p:spPr>
-          <a:xfrm>
-            <a:off x="9601200" y="1600200"/>
-            <a:ext cx="530352" cy="0"/>
-          </a:xfrm>
-          <a:prstGeom prst="line">
-            <a:avLst/>
-          </a:prstGeom>
-          <a:ln w="17780">
-            <a:solidFill>
-              <a:srgbClr val="555555"/>
-            </a:solidFill>
-          </a:ln>
-          <a:effectLst/>
-        </p:spPr>
-      </p:cxnSp>
-      <p:sp>
-        <p:nvSpPr>
-          <p:cNvPr id="97" name="Rectangle 96"/>
-          <p:cNvSpPr/>
-          <p:nvPr/>
-        </p:nvSpPr>
-        <p:spPr>
-          <a:xfrm>
-            <a:off x="9646920" y="1097280"/>
-            <a:ext cx="118872" cy="502920"/>
-          </a:xfrm>
-          <a:prstGeom prst="rect">
-            <a:avLst/>
-          </a:prstGeom>
-          <a:solidFill>
-            <a:srgbClr val="4C72B0"/>
-          </a:solidFill>
-          <a:ln w="12700">
-            <a:solidFill>
-              <a:srgbClr val="666666"/>
-            </a:solidFill>
-          </a:ln>
-          <a:effectLst/>
-        </p:spPr>
-        <p:txBody>
-          <a:bodyPr rtlCol="0" anchor="ctr"/>
-          <a:lstStyle/>
-          <a:p>
-            <a:pPr algn="ctr"/>
-          </a:p>
-        </p:txBody>
-      </p:sp>
-      <p:sp>
-        <p:nvSpPr>
-          <p:cNvPr id="98" name="Rectangle 97"/>
-          <p:cNvSpPr/>
-          <p:nvPr/>
-        </p:nvSpPr>
-        <p:spPr>
-          <a:xfrm>
-            <a:off x="9806940" y="1463040"/>
-            <a:ext cx="118872" cy="137160"/>
-          </a:xfrm>
-          <a:prstGeom prst="rect">
-            <a:avLst/>
-          </a:prstGeom>
-          <a:solidFill>
-            <a:srgbClr val="C9C9C9"/>
-          </a:solidFill>
-          <a:ln w="12700">
-            <a:solidFill>
-              <a:srgbClr val="666666"/>
-            </a:solidFill>
-          </a:ln>
-          <a:effectLst/>
-        </p:spPr>
-        <p:txBody>
-          <a:bodyPr rtlCol="0" anchor="ctr"/>
-          <a:lstStyle/>
-          <a:p>
-            <a:pPr algn="ctr"/>
-          </a:p>
-        </p:txBody>
-      </p:sp>
-      <p:sp>
-        <p:nvSpPr>
-          <p:cNvPr id="99" name="Rectangle 98"/>
-          <p:cNvSpPr/>
-          <p:nvPr/>
-        </p:nvSpPr>
-        <p:spPr>
-          <a:xfrm>
-            <a:off x="9966960" y="1325880"/>
-            <a:ext cx="118872" cy="274320"/>
-          </a:xfrm>
-          <a:prstGeom prst="rect">
-            <a:avLst/>
-          </a:prstGeom>
-          <a:solidFill>
-            <a:srgbClr val="5F9EA0"/>
-          </a:solidFill>
-          <a:ln w="12700">
-            <a:solidFill>
-              <a:srgbClr val="666666"/>
-            </a:solidFill>
-          </a:ln>
-          <a:effectLst/>
-        </p:spPr>
-        <p:txBody>
-          <a:bodyPr rtlCol="0" anchor="ctr"/>
-          <a:lstStyle/>
-          <a:p>
-            <a:pPr algn="ctr"/>
-          </a:p>
-        </p:txBody>
-      </p:sp>
-      <p:sp>
-        <p:nvSpPr>
-          <p:cNvPr id="100" name="TextBox 99"/>
-          <p:cNvSpPr txBox="1"/>
-          <p:nvPr/>
-        </p:nvSpPr>
-        <p:spPr>
-          <a:xfrm>
-            <a:off x="9418320" y="1719072"/>
-            <a:ext cx="1463040" cy="274320"/>
-          </a:xfrm>
-          <a:prstGeom prst="rect">
-            <a:avLst/>
-          </a:prstGeom>
-          <a:noFill/>
-        </p:spPr>
-        <p:txBody>
-          <a:bodyPr wrap="square" lIns="0" rIns="0" tIns="0" bIns="0">
-            <a:spAutoFit/>
-          </a:bodyPr>
-          <a:lstStyle/>
-          <a:p>
-            <a:pPr algn="ctr"/>
-            <a:r>
-              <a:rPr sz="1000" b="1" i="1">
-                <a:solidFill>
-                  <a:srgbClr val="1F1F1E"/>
-                </a:solidFill>
-                <a:latin typeface="Times New Roman"/>
-              </a:rPr>
-              <a:t>r  remaining quota</a:t>
-            </a:r>
-          </a:p>
-        </p:txBody>
-      </p:sp>
-      <p:sp>
-        <p:nvSpPr>
-          <p:cNvPr id="101" name="TextBox 100"/>
-          <p:cNvSpPr txBox="1"/>
-          <p:nvPr/>
-        </p:nvSpPr>
-        <p:spPr>
-          <a:xfrm>
-            <a:off x="10744200" y="960120"/>
-            <a:ext cx="1371600" cy="822960"/>
-          </a:xfrm>
-          <a:prstGeom prst="rect">
-            <a:avLst/>
-          </a:prstGeom>
-          <a:noFill/>
-        </p:spPr>
-        <p:txBody>
-          <a:bodyPr wrap="square" lIns="0" rIns="0" tIns="0" bIns="0">
-            <a:spAutoFit/>
-          </a:bodyPr>
-          <a:lstStyle/>
-          <a:p>
-            <a:pPr algn="ctr"/>
-            <a:r>
-              <a:rPr sz="1300" b="0" i="0">
-                <a:solidFill>
-                  <a:srgbClr val="1F1F1E"/>
-                </a:solidFill>
-                <a:latin typeface="Times New Roman"/>
-              </a:rPr>
               <a:t>u(x) =</a:t>
             </a:r>
           </a:p>
           <a:p>
             <a:pPr algn="ctr"/>
             <a:r>
-              <a:rPr sz="1300" b="0" i="0">
+              <a:rPr sz="1500" b="0" i="0">
                 <a:solidFill>
                   <a:srgbClr val="1F1F1E"/>
                 </a:solidFill>
@@ -6185,7 +6185,7 @@
           <a:p>
             <a:pPr algn="l"/>
             <a:r>
-              <a:rPr sz="1100" b="0" i="0">
+              <a:rPr sz="1400" b="0" i="0">
                 <a:solidFill>
                   <a:srgbClr val="6B6A63"/>
                 </a:solidFill>
@@ -6204,8 +6204,8 @@
         </p:nvSpPr>
         <p:spPr>
           <a:xfrm>
-            <a:off x="9418320" y="2240280"/>
-            <a:ext cx="310896" cy="310896"/>
+            <a:off x="9418320" y="2194560"/>
+            <a:ext cx="402336" cy="402336"/>
           </a:xfrm>
           <a:prstGeom prst="ellipse">
             <a:avLst/>
@@ -6245,8 +6245,8 @@
         </p:nvSpPr>
         <p:spPr>
           <a:xfrm>
-            <a:off x="9829800" y="2240280"/>
-            <a:ext cx="310896" cy="310896"/>
+            <a:off x="9921240" y="2194560"/>
+            <a:ext cx="402336" cy="402336"/>
           </a:xfrm>
           <a:prstGeom prst="ellipse">
             <a:avLst/>
@@ -6286,8 +6286,8 @@
         </p:nvSpPr>
         <p:spPr>
           <a:xfrm>
-            <a:off x="10241280" y="2249424"/>
-            <a:ext cx="1737360" cy="292608"/>
+            <a:off x="10241280" y="2212848"/>
+            <a:ext cx="1828800" cy="329184"/>
           </a:xfrm>
           <a:prstGeom prst="rect">
             <a:avLst/>
@@ -6302,7 +6302,7 @@
           <a:p>
             <a:pPr algn="l"/>
             <a:r>
-              <a:rPr sz="1100" b="0" i="0">
+              <a:rPr sz="1400" b="0" i="0">
                 <a:solidFill>
                   <a:srgbClr val="6B6A63"/>
                 </a:solidFill>
@@ -6322,7 +6322,7 @@
         <p:spPr>
           <a:xfrm>
             <a:off x="6629400" y="3547872"/>
-            <a:ext cx="530352" cy="0"/>
+            <a:ext cx="658368" cy="0"/>
           </a:xfrm>
           <a:prstGeom prst="line">
             <a:avLst/>
@@ -6344,7 +6344,7 @@
         <p:spPr>
           <a:xfrm>
             <a:off x="6629400" y="3401568"/>
-            <a:ext cx="530352" cy="0"/>
+            <a:ext cx="658368" cy="0"/>
           </a:xfrm>
           <a:prstGeom prst="line">
             <a:avLst/>
@@ -6366,7 +6366,7 @@
         <p:spPr>
           <a:xfrm>
             <a:off x="6629400" y="3255264"/>
-            <a:ext cx="530352" cy="0"/>
+            <a:ext cx="658368" cy="0"/>
           </a:xfrm>
           <a:prstGeom prst="line">
             <a:avLst/>
@@ -6388,7 +6388,7 @@
         <p:spPr>
           <a:xfrm>
             <a:off x="6629400" y="3108960"/>
-            <a:ext cx="530352" cy="0"/>
+            <a:ext cx="658368" cy="0"/>
           </a:xfrm>
           <a:prstGeom prst="line">
             <a:avLst/>
@@ -6410,7 +6410,7 @@
         <p:spPr>
           <a:xfrm>
             <a:off x="6629400" y="3566160"/>
-            <a:ext cx="530351" cy="0"/>
+            <a:ext cx="658368" cy="0"/>
           </a:xfrm>
           <a:prstGeom prst="line">
             <a:avLst/>
@@ -6432,7 +6432,7 @@
         <p:spPr>
           <a:xfrm>
             <a:off x="6675120" y="2999232"/>
-            <a:ext cx="118872" cy="566928"/>
+            <a:ext cx="155448" cy="566928"/>
           </a:xfrm>
           <a:prstGeom prst="rect">
             <a:avLst/>
@@ -6463,8 +6463,8 @@
         </p:nvSpPr>
         <p:spPr>
           <a:xfrm>
-            <a:off x="6835140" y="3200400"/>
-            <a:ext cx="118872" cy="365760"/>
+            <a:off x="6880859" y="3200400"/>
+            <a:ext cx="155448" cy="365760"/>
           </a:xfrm>
           <a:prstGeom prst="rect">
             <a:avLst/>
@@ -6495,8 +6495,8 @@
         </p:nvSpPr>
         <p:spPr>
           <a:xfrm>
-            <a:off x="6995159" y="3328415"/>
-            <a:ext cx="118872" cy="237744"/>
+            <a:off x="7086600" y="3328415"/>
+            <a:ext cx="155448" cy="237744"/>
           </a:xfrm>
           <a:prstGeom prst="rect">
             <a:avLst/>
@@ -6551,7 +6551,7 @@
         <p:spPr>
           <a:xfrm>
             <a:off x="8412480" y="3547872"/>
-            <a:ext cx="530352" cy="0"/>
+            <a:ext cx="658368" cy="0"/>
           </a:xfrm>
           <a:prstGeom prst="line">
             <a:avLst/>
@@ -6573,7 +6573,7 @@
         <p:spPr>
           <a:xfrm>
             <a:off x="8412480" y="3401568"/>
-            <a:ext cx="530352" cy="0"/>
+            <a:ext cx="658368" cy="0"/>
           </a:xfrm>
           <a:prstGeom prst="line">
             <a:avLst/>
@@ -6595,7 +6595,7 @@
         <p:spPr>
           <a:xfrm>
             <a:off x="8412480" y="3255264"/>
-            <a:ext cx="530352" cy="0"/>
+            <a:ext cx="658368" cy="0"/>
           </a:xfrm>
           <a:prstGeom prst="line">
             <a:avLst/>
@@ -6617,7 +6617,7 @@
         <p:spPr>
           <a:xfrm>
             <a:off x="8412480" y="3108960"/>
-            <a:ext cx="530352" cy="0"/>
+            <a:ext cx="658368" cy="0"/>
           </a:xfrm>
           <a:prstGeom prst="line">
             <a:avLst/>
@@ -6639,7 +6639,7 @@
         <p:spPr>
           <a:xfrm>
             <a:off x="8412480" y="3566160"/>
-            <a:ext cx="530352" cy="0"/>
+            <a:ext cx="658368" cy="0"/>
           </a:xfrm>
           <a:prstGeom prst="line">
             <a:avLst/>
@@ -6661,7 +6661,7 @@
         <p:spPr>
           <a:xfrm>
             <a:off x="8458200" y="3419856"/>
-            <a:ext cx="118872" cy="146304"/>
+            <a:ext cx="155448" cy="146304"/>
           </a:xfrm>
           <a:prstGeom prst="rect">
             <a:avLst/>
@@ -6692,8 +6692,8 @@
         </p:nvSpPr>
         <p:spPr>
           <a:xfrm>
-            <a:off x="8618220" y="3474720"/>
-            <a:ext cx="118872" cy="91440"/>
+            <a:off x="8663940" y="3474720"/>
+            <a:ext cx="155448" cy="91440"/>
           </a:xfrm>
           <a:prstGeom prst="rect">
             <a:avLst/>
@@ -6724,8 +6724,8 @@
         </p:nvSpPr>
         <p:spPr>
           <a:xfrm>
-            <a:off x="8778240" y="3511296"/>
-            <a:ext cx="118872" cy="54864"/>
+            <a:off x="8869680" y="3511296"/>
+            <a:ext cx="155448" cy="54864"/>
           </a:xfrm>
           <a:prstGeom prst="rect">
             <a:avLst/>
@@ -6756,8 +6756,8 @@
         </p:nvSpPr>
         <p:spPr>
           <a:xfrm>
-            <a:off x="6492240" y="3657600"/>
-            <a:ext cx="3017520" cy="274320"/>
+            <a:off x="6355080" y="3675887"/>
+            <a:ext cx="3474720" cy="274320"/>
           </a:xfrm>
           <a:prstGeom prst="rect">
             <a:avLst/>
@@ -6772,7 +6772,7 @@
           <a:p>
             <a:pPr algn="ctr"/>
             <a:r>
-              <a:rPr sz="1000" b="1" i="1">
+              <a:rPr sz="1250" b="1" i="1">
                 <a:solidFill>
                   <a:srgbClr val="1F1F1E"/>
                 </a:solidFill>
@@ -6807,7 +6807,7 @@
           <a:p>
             <a:pPr algn="l"/>
             <a:r>
-              <a:rPr sz="1400" b="1" i="1">
+              <a:rPr sz="1900" b="1" i="1">
                 <a:solidFill>
                   <a:srgbClr val="1F1F1E"/>
                 </a:solidFill>
@@ -7114,8 +7114,8 @@
         </p:nvSpPr>
         <p:spPr>
           <a:xfrm>
-            <a:off x="6217920" y="5897880"/>
-            <a:ext cx="1463040" cy="274320"/>
+            <a:off x="6126480" y="5943600"/>
+            <a:ext cx="2011680" cy="274320"/>
           </a:xfrm>
           <a:prstGeom prst="rect">
             <a:avLst/>
@@ -7130,7 +7130,7 @@
           <a:p>
             <a:pPr algn="ctr"/>
             <a:r>
-              <a:rPr sz="950" b="1" i="1">
+              <a:rPr sz="1200" b="1" i="1">
                 <a:solidFill>
                   <a:srgbClr val="1F1F1E"/>
                 </a:solidFill>
@@ -7357,8 +7357,8 @@
         </p:nvSpPr>
         <p:spPr>
           <a:xfrm>
-            <a:off x="7818120" y="5760720"/>
-            <a:ext cx="2011680" cy="274320"/>
+            <a:off x="7726679" y="5833872"/>
+            <a:ext cx="2286000" cy="274320"/>
           </a:xfrm>
           <a:prstGeom prst="rect">
             <a:avLst/>
@@ -7373,7 +7373,7 @@
           <a:p>
             <a:pPr algn="ctr"/>
             <a:r>
-              <a:rPr sz="950" b="1" i="1">
+              <a:rPr sz="1200" b="1" i="1">
                 <a:solidFill>
                   <a:srgbClr val="1F1F1E"/>
                 </a:solidFill>
@@ -7392,8 +7392,8 @@
         </p:nvSpPr>
         <p:spPr>
           <a:xfrm>
-            <a:off x="10104120" y="4480560"/>
-            <a:ext cx="1691640" cy="960120"/>
+            <a:off x="9966960" y="4462272"/>
+            <a:ext cx="2029968" cy="1005840"/>
           </a:xfrm>
           <a:prstGeom prst="roundRect">
             <a:avLst>
@@ -7426,8 +7426,8 @@
         </p:nvSpPr>
         <p:spPr>
           <a:xfrm>
-            <a:off x="10241280" y="4617720"/>
-            <a:ext cx="502920" cy="502920"/>
+            <a:off x="10195560" y="4572000"/>
+            <a:ext cx="603504" cy="603504"/>
           </a:xfrm>
           <a:prstGeom prst="ellipse">
             <a:avLst/>
@@ -7467,8 +7467,8 @@
         </p:nvSpPr>
         <p:spPr>
           <a:xfrm>
-            <a:off x="10789920" y="4590288"/>
-            <a:ext cx="960120" cy="640080"/>
+            <a:off x="10835640" y="4626864"/>
+            <a:ext cx="1188720" cy="640080"/>
           </a:xfrm>
           <a:prstGeom prst="rect">
             <a:avLst/>
@@ -7483,7 +7483,7 @@
           <a:p>
             <a:pPr algn="l"/>
             <a:r>
-              <a:rPr sz="1000" b="0" i="0">
+              <a:rPr sz="1250" b="0" i="0">
                 <a:solidFill>
                   <a:srgbClr val="1F1F1E"/>
                 </a:solidFill>
@@ -7495,7 +7495,7 @@
           <a:p>
             <a:pPr algn="l"/>
             <a:r>
-              <a:rPr sz="1000" b="0" i="0">
+              <a:rPr sz="1250" b="0" i="0">
                 <a:solidFill>
                   <a:srgbClr val="1F1F1E"/>
                 </a:solidFill>
@@ -7514,7 +7514,7 @@
         </p:nvSpPr>
         <p:spPr>
           <a:xfrm>
-            <a:off x="10058400" y="5504688"/>
+            <a:off x="10058400" y="5541264"/>
             <a:ext cx="1828800" cy="274320"/>
           </a:xfrm>
           <a:prstGeom prst="rect">
@@ -7530,7 +7530,7 @@
           <a:p>
             <a:pPr algn="ctr"/>
             <a:r>
-              <a:rPr sz="1100" b="1" i="1">
+              <a:rPr sz="1400" b="1" i="1">
                 <a:solidFill>
                   <a:srgbClr val="1F1F1E"/>
                 </a:solidFill>
@@ -7565,7 +7565,7 @@
           <a:p>
             <a:pPr algn="ctr"/>
             <a:r>
-              <a:rPr sz="1000" b="0" i="0">
+              <a:rPr sz="1300" b="0" i="0">
                 <a:solidFill>
                   <a:srgbClr val="6B6A63"/>
                 </a:solidFill>
